--- a/Eco-Drain_WEFE_Nexus_5Min_Pitch_EN.pptx
+++ b/Eco-Drain_WEFE_Nexus_5Min_Pitch_EN.pptx
@@ -3135,14 +3135,116 @@
       </p:sp>
       <p:sp>
         <p:nvSpPr>
-          <p:cNvPr id="3" name="TextBox 2"/>
+          <p:cNvPr id="3" name="Rounded Rectangle 2"/>
+          <p:cNvSpPr/>
+          <p:nvPr/>
+        </p:nvSpPr>
+        <p:spPr>
+          <a:xfrm>
+            <a:off x="731520" y="146304"/>
+            <a:ext cx="10728655" cy="36576"/>
+          </a:xfrm>
+          <a:prstGeom prst="roundRect">
+            <a:avLst>
+              <a:gd name="adj" fmla="val 50000"/>
+            </a:avLst>
+          </a:prstGeom>
+          <a:solidFill>
+            <a:srgbClr val="15B5A4"/>
+          </a:solidFill>
+          <a:ln>
+            <a:noFill/>
+          </a:ln>
+        </p:spPr>
+        <p:style>
+          <a:lnRef idx="1">
+            <a:schemeClr val="accent1"/>
+          </a:lnRef>
+          <a:fillRef idx="3">
+            <a:schemeClr val="accent1"/>
+          </a:fillRef>
+          <a:effectRef idx="2">
+            <a:schemeClr val="accent1"/>
+          </a:effectRef>
+          <a:fontRef idx="minor">
+            <a:schemeClr val="lt1"/>
+          </a:fontRef>
+        </p:style>
+        <p:txBody>
+          <a:bodyPr rtlCol="0" anchor="ctr"/>
+          <a:lstStyle/>
+          <a:p>
+            <a:pPr algn="ctr"/>
+          </a:p>
+        </p:txBody>
+      </p:sp>
+      <p:sp>
+        <p:nvSpPr>
+          <p:cNvPr id="4" name="Rounded Rectangle 3"/>
+          <p:cNvSpPr/>
+          <p:nvPr/>
+        </p:nvSpPr>
+        <p:spPr>
+          <a:xfrm>
+            <a:off x="731520" y="292608"/>
+            <a:ext cx="4846320" cy="292608"/>
+          </a:xfrm>
+          <a:prstGeom prst="roundRect">
+            <a:avLst>
+              <a:gd name="adj" fmla="val 50000"/>
+            </a:avLst>
+          </a:prstGeom>
+          <a:solidFill>
+            <a:srgbClr val="162D52"/>
+          </a:solidFill>
+          <a:ln w="15240">
+            <a:solidFill>
+              <a:srgbClr val="15B5A4"/>
+            </a:solidFill>
+          </a:ln>
+        </p:spPr>
+        <p:style>
+          <a:lnRef idx="1">
+            <a:schemeClr val="accent1"/>
+          </a:lnRef>
+          <a:fillRef idx="3">
+            <a:schemeClr val="accent1"/>
+          </a:fillRef>
+          <a:effectRef idx="2">
+            <a:schemeClr val="accent1"/>
+          </a:effectRef>
+          <a:fontRef idx="minor">
+            <a:schemeClr val="lt1"/>
+          </a:fontRef>
+        </p:style>
+        <p:txBody>
+          <a:bodyPr rtlCol="0" anchor="ctr" wrap="none" tIns="0" bIns="0" lIns="0" rIns="0"/>
+          <a:lstStyle/>
+          <a:p>
+            <a:pPr algn="ctr">
+              <a:defRPr sz="1050" b="1">
+                <a:solidFill>
+                  <a:srgbClr val="15B5A4"/>
+                </a:solidFill>
+                <a:latin typeface="Segoe UI"/>
+              </a:defRPr>
+            </a:pPr>
+            <a:r>
+              <a:t>SLIDE 1 OF 3 | 5-MIN EXECUTIVE PITCH | CLIMATE RESILIENT WEFE</a:t>
+            </a:r>
+          </a:p>
+        </p:txBody>
+      </p:sp>
+      <p:sp>
+        <p:nvSpPr>
+          <p:cNvPr id="5" name="TextBox 4"/>
           <p:cNvSpPr txBox="1"/>
           <p:nvPr/>
         </p:nvSpPr>
         <p:spPr>
           <a:xfrm>
-            <a:off x="731520" y="365760"/>
-            <a:ext cx="10728655" cy="1051560"/>
+            <a:off x="731520" y="658368"/>
+            <a:ext cx="10728655" cy="804672"/>
           </a:xfrm>
           <a:prstGeom prst="rect">
             <a:avLst/>
@@ -3156,58 +3258,633 @@
           <a:lstStyle/>
           <a:p>
             <a:pPr algn="l">
-              <a:defRPr sz="950" b="1">
-                <a:solidFill>
-                  <a:srgbClr val="15B5A4"/>
-                </a:solidFill>
+              <a:lnSpc>
+                <a:spcPct val="115000"/>
+              </a:lnSpc>
+              <a:defRPr sz="2200" b="1">
+                <a:solidFill>
+                  <a:srgbClr val="F8FAFC"/>
+                </a:solidFill>
+                <a:latin typeface="Segoe UI"/>
               </a:defRPr>
             </a:pPr>
             <a:r>
-              <a:t>SLIDE 1 OF 3 | 5-MIN EXECUTIVE PITCH | WEFE NEXUS PROFESSIONAL SERIES</a:t>
+              <a:t>Eco-Drain: Invisible Tamper-Proof Subsurface Drainage Retrofitting</a:t>
             </a:r>
           </a:p>
           <a:p>
             <a:pPr algn="l">
-              <a:defRPr sz="1900" b="1">
-                <a:solidFill>
-                  <a:srgbClr val="F8FAFC"/>
-                </a:solidFill>
+              <a:lnSpc>
+                <a:spcPct val="120000"/>
+              </a:lnSpc>
+              <a:defRPr sz="1200">
+                <a:solidFill>
+                  <a:srgbClr val="F0C860"/>
+                </a:solidFill>
+                <a:latin typeface="Segoe UI"/>
               </a:defRPr>
             </a:pPr>
             <a:r>
-              <a:t>Eco-Drain: Invisible Tamper-Proof Subsurface Drainage Retrofitting</a:t>
-            </a:r>
-          </a:p>
-          <a:p>
-            <a:pPr algn="l">
-              <a:defRPr sz="1100">
-                <a:solidFill>
-                  <a:srgbClr val="F0C860"/>
-                </a:solidFill>
-              </a:defRPr>
-            </a:pPr>
-            <a:r>
-              <a:t>1. Project Title &amp; Problem Addressed | 3. Lead Institution &amp; Key Governance Arrangements</a:t>
-            </a:r>
-          </a:p>
-        </p:txBody>
-      </p:sp>
-      <p:sp>
-        <p:nvSpPr>
-          <p:cNvPr id="4" name="Rounded Rectangle 3"/>
+              <a:t>1. Problem Statement &amp; Tampering Challenge | 3. Lead Institution, Partners &amp; Governance Arrangements</a:t>
+            </a:r>
+          </a:p>
+        </p:txBody>
+      </p:sp>
+      <p:sp>
+        <p:nvSpPr>
+          <p:cNvPr id="6" name="Rounded Rectangle 5"/>
           <p:cNvSpPr/>
           <p:nvPr/>
         </p:nvSpPr>
         <p:spPr>
           <a:xfrm>
-            <a:off x="731520" y="1463040"/>
+            <a:off x="731520" y="1536192"/>
             <a:ext cx="5212080" cy="2377440"/>
           </a:xfrm>
           <a:prstGeom prst="roundRect">
-            <a:avLst/>
+            <a:avLst>
+              <a:gd name="adj" fmla="val 8000"/>
+            </a:avLst>
           </a:prstGeom>
           <a:solidFill>
             <a:srgbClr val="0F2240"/>
+          </a:solidFill>
+          <a:ln w="16510">
+            <a:solidFill>
+              <a:srgbClr val="EF4444"/>
+            </a:solidFill>
+          </a:ln>
+        </p:spPr>
+        <p:style>
+          <a:lnRef idx="1">
+            <a:schemeClr val="accent1"/>
+          </a:lnRef>
+          <a:fillRef idx="3">
+            <a:schemeClr val="accent1"/>
+          </a:fillRef>
+          <a:effectRef idx="2">
+            <a:schemeClr val="accent1"/>
+          </a:effectRef>
+          <a:fontRef idx="minor">
+            <a:schemeClr val="lt1"/>
+          </a:fontRef>
+        </p:style>
+        <p:txBody>
+          <a:bodyPr rtlCol="0" anchor="ctr"/>
+          <a:lstStyle/>
+          <a:p>
+            <a:pPr algn="ctr"/>
+          </a:p>
+        </p:txBody>
+      </p:sp>
+      <p:sp>
+        <p:nvSpPr>
+          <p:cNvPr id="7" name="TextBox 6"/>
+          <p:cNvSpPr txBox="1"/>
+          <p:nvPr/>
+        </p:nvSpPr>
+        <p:spPr>
+          <a:xfrm>
+            <a:off x="932688" y="1645920"/>
+            <a:ext cx="4809744" cy="347472"/>
+          </a:xfrm>
+          <a:prstGeom prst="rect">
+            <a:avLst/>
+          </a:prstGeom>
+          <a:noFill/>
+        </p:spPr>
+        <p:txBody>
+          <a:bodyPr wrap="square" tIns="0" bIns="0" lIns="0" rIns="0">
+            <a:spAutoFit/>
+          </a:bodyPr>
+          <a:lstStyle/>
+          <a:p>
+            <a:pPr algn="l">
+              <a:defRPr sz="1450" b="1">
+                <a:solidFill>
+                  <a:srgbClr val="EF4444"/>
+                </a:solidFill>
+                <a:latin typeface="Segoe UI"/>
+              </a:defRPr>
+            </a:pPr>
+            <a:r>
+              <a:t>🚨 1. National Problem Statement &amp; Delta Water Crisis</a:t>
+            </a:r>
+          </a:p>
+        </p:txBody>
+      </p:sp>
+      <p:sp>
+        <p:nvSpPr>
+          <p:cNvPr id="8" name="Rounded Rectangle 7"/>
+          <p:cNvSpPr/>
+          <p:nvPr/>
+        </p:nvSpPr>
+        <p:spPr>
+          <a:xfrm>
+            <a:off x="914400" y="1975104"/>
+            <a:ext cx="4846320" cy="310896"/>
+          </a:xfrm>
+          <a:prstGeom prst="roundRect">
+            <a:avLst>
+              <a:gd name="adj" fmla="val 35000"/>
+            </a:avLst>
+          </a:prstGeom>
+          <a:solidFill>
+            <a:srgbClr val="162D52"/>
+          </a:solidFill>
+          <a:ln w="12700">
+            <a:solidFill>
+              <a:srgbClr val="EF4444"/>
+            </a:solidFill>
+          </a:ln>
+        </p:spPr>
+        <p:style>
+          <a:lnRef idx="1">
+            <a:schemeClr val="accent1"/>
+          </a:lnRef>
+          <a:fillRef idx="3">
+            <a:schemeClr val="accent1"/>
+          </a:fillRef>
+          <a:effectRef idx="2">
+            <a:schemeClr val="accent1"/>
+          </a:effectRef>
+          <a:fontRef idx="minor">
+            <a:schemeClr val="lt1"/>
+          </a:fontRef>
+        </p:style>
+        <p:txBody>
+          <a:bodyPr rtlCol="0" anchor="ctr" wrap="square" tIns="0" bIns="0" lIns="0" rIns="0"/>
+          <a:lstStyle/>
+          <a:p>
+            <a:pPr algn="l">
+              <a:defRPr sz="1150" b="1">
+                <a:solidFill>
+                  <a:srgbClr val="F0C860"/>
+                </a:solidFill>
+                <a:latin typeface="Segoe UI"/>
+              </a:defRPr>
+            </a:pPr>
+            <a:r>
+              <a:t> ⚠️ 560 m³/capita Scarcity | 2.3 Million Feddans Expired Life </a:t>
+            </a:r>
+          </a:p>
+        </p:txBody>
+      </p:sp>
+      <p:sp>
+        <p:nvSpPr>
+          <p:cNvPr id="9" name="TextBox 8"/>
+          <p:cNvSpPr txBox="1"/>
+          <p:nvPr/>
+        </p:nvSpPr>
+        <p:spPr>
+          <a:xfrm>
+            <a:off x="932688" y="2340864"/>
+            <a:ext cx="4809744" cy="1481328"/>
+          </a:xfrm>
+          <a:prstGeom prst="rect">
+            <a:avLst/>
+          </a:prstGeom>
+          <a:noFill/>
+        </p:spPr>
+        <p:txBody>
+          <a:bodyPr wrap="square" tIns="0" bIns="0" lIns="0" rIns="0">
+            <a:spAutoFit/>
+          </a:bodyPr>
+          <a:lstStyle/>
+          <a:p>
+            <a:pPr algn="l">
+              <a:lnSpc>
+                <a:spcPct val="125000"/>
+              </a:lnSpc>
+              <a:spcAft>
+                <a:spcPts val="600"/>
+              </a:spcAft>
+            </a:pPr>
+            <a:r>
+              <a:rPr sz="1150" b="1">
+                <a:solidFill>
+                  <a:srgbClr val="F0C860"/>
+                </a:solidFill>
+                <a:latin typeface="Segoe UI"/>
+              </a:rPr>
+              <a:t>• Critical Water Scarcity: </a:t>
+            </a:r>
+            <a:r>
+              <a:rPr sz="1150">
+                <a:solidFill>
+                  <a:srgbClr val="F8FAFC"/>
+                </a:solidFill>
+                <a:latin typeface="Segoe UI"/>
+              </a:rPr>
+              <a:t>Egypt's quota is 55.5 BCM for 106M+ people -&gt; 560 m³/capita (below 1,000 m³ global water poverty line).</a:t>
+            </a:r>
+          </a:p>
+          <a:p>
+            <a:pPr algn="l">
+              <a:lnSpc>
+                <a:spcPct val="125000"/>
+              </a:lnSpc>
+              <a:spcAft>
+                <a:spcPts val="600"/>
+              </a:spcAft>
+            </a:pPr>
+            <a:r>
+              <a:rPr sz="1150" b="1">
+                <a:solidFill>
+                  <a:srgbClr val="F0C860"/>
+                </a:solidFill>
+                <a:latin typeface="Segoe UI"/>
+              </a:rPr>
+              <a:t>• 2.3 Million Feddans Expired: </a:t>
+            </a:r>
+            <a:r>
+              <a:rPr sz="1150">
+                <a:solidFill>
+                  <a:srgbClr val="F8FAFC"/>
+                </a:solidFill>
+                <a:latin typeface="Segoe UI"/>
+              </a:rPr>
+              <a:t>Nile Delta drainage networks exceed design life (&gt;20 yr), causing root waterlogging &amp; slashing yields by 10-30%.</a:t>
+            </a:r>
+          </a:p>
+          <a:p>
+            <a:pPr algn="l">
+              <a:lnSpc>
+                <a:spcPct val="125000"/>
+              </a:lnSpc>
+              <a:spcAft>
+                <a:spcPts val="0"/>
+              </a:spcAft>
+            </a:pPr>
+            <a:r>
+              <a:rPr sz="1150" b="1">
+                <a:solidFill>
+                  <a:srgbClr val="F0C860"/>
+                </a:solidFill>
+                <a:latin typeface="Segoe UI"/>
+              </a:rPr>
+              <a:t>• Invisible Infrastructure Gap: </a:t>
+            </a:r>
+            <a:r>
+              <a:rPr sz="1150">
+                <a:solidFill>
+                  <a:srgbClr val="F8FAFC"/>
+                </a:solidFill>
+                <a:latin typeface="Segoe UI"/>
+              </a:rPr>
+              <a:t>Buried networks cannot be visually monitored, resulting in silent failures undetected until crop loss occurs.</a:t>
+            </a:r>
+          </a:p>
+        </p:txBody>
+      </p:sp>
+      <p:sp>
+        <p:nvSpPr>
+          <p:cNvPr id="10" name="Rounded Rectangle 9"/>
+          <p:cNvSpPr/>
+          <p:nvPr/>
+        </p:nvSpPr>
+        <p:spPr>
+          <a:xfrm>
+            <a:off x="731520" y="4069080"/>
+            <a:ext cx="5212080" cy="2423160"/>
+          </a:xfrm>
+          <a:prstGeom prst="roundRect">
+            <a:avLst>
+              <a:gd name="adj" fmla="val 8000"/>
+            </a:avLst>
+          </a:prstGeom>
+          <a:solidFill>
+            <a:srgbClr val="0F2240"/>
+          </a:solidFill>
+          <a:ln w="16510">
+            <a:solidFill>
+              <a:srgbClr val="D4A843"/>
+            </a:solidFill>
+          </a:ln>
+        </p:spPr>
+        <p:style>
+          <a:lnRef idx="1">
+            <a:schemeClr val="accent1"/>
+          </a:lnRef>
+          <a:fillRef idx="3">
+            <a:schemeClr val="accent1"/>
+          </a:fillRef>
+          <a:effectRef idx="2">
+            <a:schemeClr val="accent1"/>
+          </a:effectRef>
+          <a:fontRef idx="minor">
+            <a:schemeClr val="lt1"/>
+          </a:fontRef>
+        </p:style>
+        <p:txBody>
+          <a:bodyPr rtlCol="0" anchor="ctr"/>
+          <a:lstStyle/>
+          <a:p>
+            <a:pPr algn="ctr"/>
+          </a:p>
+        </p:txBody>
+      </p:sp>
+      <p:sp>
+        <p:nvSpPr>
+          <p:cNvPr id="11" name="TextBox 10"/>
+          <p:cNvSpPr txBox="1"/>
+          <p:nvPr/>
+        </p:nvSpPr>
+        <p:spPr>
+          <a:xfrm>
+            <a:off x="932688" y="4178808"/>
+            <a:ext cx="4809744" cy="347472"/>
+          </a:xfrm>
+          <a:prstGeom prst="rect">
+            <a:avLst/>
+          </a:prstGeom>
+          <a:noFill/>
+        </p:spPr>
+        <p:txBody>
+          <a:bodyPr wrap="square" tIns="0" bIns="0" lIns="0" rIns="0">
+            <a:spAutoFit/>
+          </a:bodyPr>
+          <a:lstStyle/>
+          <a:p>
+            <a:pPr algn="l">
+              <a:defRPr sz="1450" b="1">
+                <a:solidFill>
+                  <a:srgbClr val="F0C860"/>
+                </a:solidFill>
+                <a:latin typeface="Segoe UI"/>
+              </a:defRPr>
+            </a:pPr>
+            <a:r>
+              <a:t>🛡️ 2. The Tampering Challenge &amp; Invisible Solution</a:t>
+            </a:r>
+          </a:p>
+        </p:txBody>
+      </p:sp>
+      <p:sp>
+        <p:nvSpPr>
+          <p:cNvPr id="12" name="Rounded Rectangle 11"/>
+          <p:cNvSpPr/>
+          <p:nvPr/>
+        </p:nvSpPr>
+        <p:spPr>
+          <a:xfrm>
+            <a:off x="914400" y="4507992"/>
+            <a:ext cx="4846320" cy="310896"/>
+          </a:xfrm>
+          <a:prstGeom prst="roundRect">
+            <a:avLst>
+              <a:gd name="adj" fmla="val 35000"/>
+            </a:avLst>
+          </a:prstGeom>
+          <a:solidFill>
+            <a:srgbClr val="162D52"/>
+          </a:solidFill>
+          <a:ln w="12700">
+            <a:solidFill>
+              <a:srgbClr val="D4A843"/>
+            </a:solidFill>
+          </a:ln>
+        </p:spPr>
+        <p:style>
+          <a:lnRef idx="1">
+            <a:schemeClr val="accent1"/>
+          </a:lnRef>
+          <a:fillRef idx="3">
+            <a:schemeClr val="accent1"/>
+          </a:fillRef>
+          <a:effectRef idx="2">
+            <a:schemeClr val="accent1"/>
+          </a:effectRef>
+          <a:fontRef idx="minor">
+            <a:schemeClr val="lt1"/>
+          </a:fontRef>
+        </p:style>
+        <p:txBody>
+          <a:bodyPr rtlCol="0" anchor="ctr" wrap="square" tIns="0" bIns="0" lIns="0" rIns="0"/>
+          <a:lstStyle/>
+          <a:p>
+            <a:pPr algn="l">
+              <a:defRPr sz="1150" b="1">
+                <a:solidFill>
+                  <a:srgbClr val="15B5A4"/>
+                </a:solidFill>
+                <a:latin typeface="Segoe UI"/>
+              </a:defRPr>
+            </a:pPr>
+            <a:r>
+              <a:t> 🔒 Buried Chambers 30-50 cm | &gt;2.5g Shock Sensors &amp; NB-IoT Telemetry </a:t>
+            </a:r>
+          </a:p>
+        </p:txBody>
+      </p:sp>
+      <p:sp>
+        <p:nvSpPr>
+          <p:cNvPr id="13" name="TextBox 12"/>
+          <p:cNvSpPr txBox="1"/>
+          <p:nvPr/>
+        </p:nvSpPr>
+        <p:spPr>
+          <a:xfrm>
+            <a:off x="932688" y="4873752"/>
+            <a:ext cx="4809744" cy="1527048"/>
+          </a:xfrm>
+          <a:prstGeom prst="rect">
+            <a:avLst/>
+          </a:prstGeom>
+          <a:noFill/>
+        </p:spPr>
+        <p:txBody>
+          <a:bodyPr wrap="square" tIns="0" bIns="0" lIns="0" rIns="0">
+            <a:spAutoFit/>
+          </a:bodyPr>
+          <a:lstStyle/>
+          <a:p>
+            <a:pPr algn="l">
+              <a:lnSpc>
+                <a:spcPct val="125000"/>
+              </a:lnSpc>
+              <a:spcAft>
+                <a:spcPts val="600"/>
+              </a:spcAft>
+            </a:pPr>
+            <a:r>
+              <a:rPr sz="1150" b="1">
+                <a:solidFill>
+                  <a:srgbClr val="F0C860"/>
+                </a:solidFill>
+                <a:latin typeface="Segoe UI"/>
+              </a:rPr>
+              <a:t>• Unauthorized Interference: </a:t>
+            </a:r>
+            <a:r>
+              <a:rPr sz="1150">
+                <a:solidFill>
+                  <a:srgbClr val="F8FAFC"/>
+                </a:solidFill>
+                <a:latin typeface="Segoe UI"/>
+              </a:rPr>
+              <a:t>EPADP records show 25-40% of failures stem from farmers blocking manholes to pool water for rice cultivation.</a:t>
+            </a:r>
+          </a:p>
+          <a:p>
+            <a:pPr algn="l">
+              <a:lnSpc>
+                <a:spcPct val="125000"/>
+              </a:lnSpc>
+              <a:spcAft>
+                <a:spcPts val="600"/>
+              </a:spcAft>
+            </a:pPr>
+            <a:r>
+              <a:rPr sz="1150" b="1">
+                <a:solidFill>
+                  <a:srgbClr val="F0C860"/>
+                </a:solidFill>
+                <a:latin typeface="Segoe UI"/>
+              </a:rPr>
+              <a:t>• Eco-Drain Core Innovation: </a:t>
+            </a:r>
+            <a:r>
+              <a:rPr sz="1150">
+                <a:solidFill>
+                  <a:srgbClr val="F8FAFC"/>
+                </a:solidFill>
+                <a:latin typeface="Segoe UI"/>
+              </a:rPr>
+              <a:t>Replacing surface structures with invisible chambers buried 30-50 cm deep, secured via RFID tags &amp; GPS coordinates.</a:t>
+            </a:r>
+          </a:p>
+          <a:p>
+            <a:pPr algn="l">
+              <a:lnSpc>
+                <a:spcPct val="125000"/>
+              </a:lnSpc>
+              <a:spcAft>
+                <a:spcPts val="0"/>
+              </a:spcAft>
+            </a:pPr>
+            <a:r>
+              <a:rPr sz="1150" b="1">
+                <a:solidFill>
+                  <a:srgbClr val="F0C860"/>
+                </a:solidFill>
+                <a:latin typeface="Segoe UI"/>
+              </a:rPr>
+              <a:t>• Active Tamper Deterrence: </a:t>
+            </a:r>
+            <a:r>
+              <a:rPr sz="1150">
+                <a:solidFill>
+                  <a:srgbClr val="F8FAFC"/>
+                </a:solidFill>
+                <a:latin typeface="Segoe UI"/>
+              </a:rPr>
+              <a:t>MPU6050 sensors detect digging/shock (&gt;2.5g), triggering instant AES-128 encrypted alerts via NB-IoT to control centers.</a:t>
+            </a:r>
+          </a:p>
+        </p:txBody>
+      </p:sp>
+      <p:sp>
+        <p:nvSpPr>
+          <p:cNvPr id="14" name="Rounded Rectangle 13"/>
+          <p:cNvSpPr/>
+          <p:nvPr/>
+        </p:nvSpPr>
+        <p:spPr>
+          <a:xfrm>
+            <a:off x="6217920" y="1536192"/>
+            <a:ext cx="5242255" cy="4956048"/>
+          </a:xfrm>
+          <a:prstGeom prst="roundRect">
+            <a:avLst>
+              <a:gd name="adj" fmla="val 6000"/>
+            </a:avLst>
+          </a:prstGeom>
+          <a:solidFill>
+            <a:srgbClr val="0F2240"/>
+          </a:solidFill>
+          <a:ln w="16510">
+            <a:solidFill>
+              <a:srgbClr val="15B5A4"/>
+            </a:solidFill>
+          </a:ln>
+        </p:spPr>
+        <p:style>
+          <a:lnRef idx="1">
+            <a:schemeClr val="accent1"/>
+          </a:lnRef>
+          <a:fillRef idx="3">
+            <a:schemeClr val="accent1"/>
+          </a:fillRef>
+          <a:effectRef idx="2">
+            <a:schemeClr val="accent1"/>
+          </a:effectRef>
+          <a:fontRef idx="minor">
+            <a:schemeClr val="lt1"/>
+          </a:fontRef>
+        </p:style>
+        <p:txBody>
+          <a:bodyPr rtlCol="0" anchor="ctr"/>
+          <a:lstStyle/>
+          <a:p>
+            <a:pPr algn="ctr"/>
+          </a:p>
+        </p:txBody>
+      </p:sp>
+      <p:sp>
+        <p:nvSpPr>
+          <p:cNvPr id="15" name="TextBox 14"/>
+          <p:cNvSpPr txBox="1"/>
+          <p:nvPr/>
+        </p:nvSpPr>
+        <p:spPr>
+          <a:xfrm>
+            <a:off x="6419088" y="1645920"/>
+            <a:ext cx="4839919" cy="347472"/>
+          </a:xfrm>
+          <a:prstGeom prst="rect">
+            <a:avLst/>
+          </a:prstGeom>
+          <a:noFill/>
+        </p:spPr>
+        <p:txBody>
+          <a:bodyPr wrap="square" tIns="0" bIns="0" lIns="0" rIns="0">
+            <a:spAutoFit/>
+          </a:bodyPr>
+          <a:lstStyle/>
+          <a:p>
+            <a:pPr algn="l">
+              <a:defRPr sz="1450" b="1">
+                <a:solidFill>
+                  <a:srgbClr val="15B5A4"/>
+                </a:solidFill>
+                <a:latin typeface="Segoe UI"/>
+              </a:defRPr>
+            </a:pPr>
+            <a:r>
+              <a:t>🏛️ 3. Lead Institution, Key Partners &amp; Governance Structure</a:t>
+            </a:r>
+          </a:p>
+        </p:txBody>
+      </p:sp>
+      <p:sp>
+        <p:nvSpPr>
+          <p:cNvPr id="16" name="Rounded Rectangle 15"/>
+          <p:cNvSpPr/>
+          <p:nvPr/>
+        </p:nvSpPr>
+        <p:spPr>
+          <a:xfrm>
+            <a:off x="6400800" y="1975104"/>
+            <a:ext cx="4876495" cy="310896"/>
+          </a:xfrm>
+          <a:prstGeom prst="roundRect">
+            <a:avLst>
+              <a:gd name="adj" fmla="val 35000"/>
+            </a:avLst>
+          </a:prstGeom>
+          <a:solidFill>
+            <a:srgbClr val="162D52"/>
           </a:solidFill>
           <a:ln w="12700">
             <a:solidFill>
@@ -3230,23 +3907,33 @@
           </a:fontRef>
         </p:style>
         <p:txBody>
-          <a:bodyPr rtlCol="0" anchor="ctr"/>
-          <a:lstStyle/>
-          <a:p>
-            <a:pPr algn="ctr"/>
-          </a:p>
-        </p:txBody>
-      </p:sp>
-      <p:sp>
-        <p:nvSpPr>
-          <p:cNvPr id="5" name="TextBox 4"/>
+          <a:bodyPr rtlCol="0" anchor="ctr" wrap="square" tIns="0" bIns="0" lIns="0" rIns="0"/>
+          <a:lstStyle/>
+          <a:p>
+            <a:pPr algn="l">
+              <a:defRPr sz="1150" b="1">
+                <a:solidFill>
+                  <a:srgbClr val="F0C860"/>
+                </a:solidFill>
+                <a:latin typeface="Segoe UI"/>
+              </a:defRPr>
+            </a:pPr>
+            <a:r>
+              <a:t> 👑 Executive Lead: Ministry of Water Resources &amp; Irrigation (MWRI) / EPADP </a:t>
+            </a:r>
+          </a:p>
+        </p:txBody>
+      </p:sp>
+      <p:sp>
+        <p:nvSpPr>
+          <p:cNvPr id="17" name="TextBox 16"/>
           <p:cNvSpPr txBox="1"/>
           <p:nvPr/>
         </p:nvSpPr>
         <p:spPr>
           <a:xfrm>
-            <a:off x="914400" y="1600200"/>
-            <a:ext cx="4846320" cy="365760"/>
+            <a:off x="6419088" y="2340864"/>
+            <a:ext cx="4839919" cy="4059936"/>
           </a:xfrm>
           <a:prstGeom prst="rect">
             <a:avLst/>
@@ -3260,407 +3947,170 @@
           <a:lstStyle/>
           <a:p>
             <a:pPr algn="l">
-              <a:defRPr sz="1200" b="1">
-                <a:solidFill>
-                  <a:srgbClr val="EF4444"/>
-                </a:solidFill>
-              </a:defRPr>
-            </a:pPr>
-            <a:r>
-              <a:t>🚨 1. National Problem Statement &amp; Delta Water Crisis</a:t>
-            </a:r>
-          </a:p>
-        </p:txBody>
-      </p:sp>
-      <p:sp>
-        <p:nvSpPr>
-          <p:cNvPr id="6" name="TextBox 5"/>
-          <p:cNvSpPr txBox="1"/>
-          <p:nvPr/>
-        </p:nvSpPr>
-        <p:spPr>
-          <a:xfrm>
-            <a:off x="914400" y="1965960"/>
-            <a:ext cx="4846320" cy="1783080"/>
-          </a:xfrm>
-          <a:prstGeom prst="rect">
-            <a:avLst/>
-          </a:prstGeom>
-          <a:noFill/>
-        </p:spPr>
-        <p:txBody>
-          <a:bodyPr wrap="square" tIns="0" bIns="0" lIns="0" rIns="0">
-            <a:spAutoFit/>
-          </a:bodyPr>
-          <a:lstStyle/>
+              <a:lnSpc>
+                <a:spcPct val="125000"/>
+              </a:lnSpc>
+              <a:spcAft>
+                <a:spcPts val="700"/>
+              </a:spcAft>
+            </a:pPr>
+            <a:r>
+              <a:rPr sz="1150" b="1">
+                <a:solidFill>
+                  <a:srgbClr val="F0C860"/>
+                </a:solidFill>
+                <a:latin typeface="Segoe UI"/>
+              </a:rPr>
+              <a:t>• Lead Executive Institution: </a:t>
+            </a:r>
+            <a:r>
+              <a:rPr sz="1150">
+                <a:solidFill>
+                  <a:srgbClr val="F8FAFC"/>
+                </a:solidFill>
+                <a:latin typeface="Segoe UI"/>
+              </a:rPr>
+              <a:t>Ministry of Water Resources and Irrigation (MWRI) / Egyptian Public Authority for Drainage Projects (EPADP).</a:t>
+            </a:r>
+          </a:p>
           <a:p>
             <a:pPr algn="l">
-              <a:defRPr sz="950">
+              <a:lnSpc>
+                <a:spcPct val="125000"/>
+              </a:lnSpc>
+              <a:spcAft>
+                <a:spcPts val="600"/>
+              </a:spcAft>
+            </a:pPr>
+            <a:r>
+              <a:rPr sz="1150" b="1">
+                <a:solidFill>
+                  <a:srgbClr val="15B5A4"/>
+                </a:solidFill>
+                <a:latin typeface="Segoe UI"/>
+              </a:rPr>
+              <a:t>• Technical &amp; Agricultural Partners: </a:t>
+            </a:r>
+            <a:r>
+              <a:rPr sz="1150">
                 <a:solidFill>
                   <a:srgbClr val="F8FAFC"/>
                 </a:solidFill>
-              </a:defRPr>
-            </a:pPr>
-            <a:r>
-              <a:t>• Severe Water Scarcity: Egypt's quota is 55.5 BCM for 106M+ people -&gt; 560 m³/capita (below 1,000 m³ water poverty line).</a:t>
+                <a:latin typeface="Segoe UI"/>
+              </a:rPr>
+              <a:t>Drainage Research Institute (DRI - NWRC) for independent MRV, and Ministry of Agriculture (MALR) for crop advisory.</a:t>
             </a:r>
           </a:p>
           <a:p>
             <a:pPr algn="l">
-              <a:defRPr sz="950">
+              <a:lnSpc>
+                <a:spcPct val="125000"/>
+              </a:lnSpc>
+              <a:spcAft>
+                <a:spcPts val="600"/>
+              </a:spcAft>
+            </a:pPr>
+            <a:r>
+              <a:rPr sz="1150" b="1">
+                <a:solidFill>
+                  <a:srgbClr val="15B5A4"/>
+                </a:solidFill>
+                <a:latin typeface="Segoe UI"/>
+              </a:rPr>
+              <a:t>• Energy &amp; Regulatory Partner: </a:t>
+            </a:r>
+            <a:r>
+              <a:rPr sz="1150">
                 <a:solidFill>
                   <a:srgbClr val="F8FAFC"/>
                 </a:solidFill>
-              </a:defRPr>
-            </a:pPr>
-            <a:r>
-              <a:t>• 2.3 Million Feddans Expired: Aging Nile Delta subsurface drainage (&gt;20 yr design life) causes waterlogging &amp; root-zone salinity, slashing crop yields by 10–30%.</a:t>
+                <a:latin typeface="Segoe UI"/>
+              </a:rPr>
+              <a:t>New &amp; Renewable Energy Authority (NREA) &amp; EgyptERA for 50 MW net-metering grid interconnection.</a:t>
             </a:r>
           </a:p>
           <a:p>
             <a:pPr algn="l">
-              <a:defRPr sz="950">
+              <a:lnSpc>
+                <a:spcPct val="125000"/>
+              </a:lnSpc>
+              <a:spcAft>
+                <a:spcPts val="600"/>
+              </a:spcAft>
+            </a:pPr>
+            <a:r>
+              <a:rPr sz="1150" b="1">
+                <a:solidFill>
+                  <a:srgbClr val="15B5A4"/>
+                </a:solidFill>
+                <a:latin typeface="Segoe UI"/>
+              </a:rPr>
+              <a:t>• Community &amp; Field Governance: </a:t>
+            </a:r>
+            <a:r>
+              <a:rPr sz="1150">
                 <a:solidFill>
                   <a:srgbClr val="F8FAFC"/>
                 </a:solidFill>
-              </a:defRPr>
-            </a:pPr>
-            <a:r>
-              <a:t>• The Invisible Infrastructure Gap: Buried networks cannot be visually monitored, resulting in silent failures undetected until topsoil salinization is severe.</a:t>
-            </a:r>
-          </a:p>
-        </p:txBody>
-      </p:sp>
-      <p:sp>
-        <p:nvSpPr>
-          <p:cNvPr id="7" name="Rounded Rectangle 6"/>
-          <p:cNvSpPr/>
-          <p:nvPr/>
-        </p:nvSpPr>
-        <p:spPr>
-          <a:xfrm>
-            <a:off x="731520" y="3977639"/>
-            <a:ext cx="5212080" cy="2423160"/>
-          </a:xfrm>
-          <a:prstGeom prst="roundRect">
-            <a:avLst/>
-          </a:prstGeom>
-          <a:solidFill>
-            <a:srgbClr val="0F2240"/>
-          </a:solidFill>
-          <a:ln w="12700">
-            <a:solidFill>
-              <a:srgbClr val="15B5A4"/>
-            </a:solidFill>
-          </a:ln>
-        </p:spPr>
-        <p:style>
-          <a:lnRef idx="1">
-            <a:schemeClr val="accent1"/>
-          </a:lnRef>
-          <a:fillRef idx="3">
-            <a:schemeClr val="accent1"/>
-          </a:fillRef>
-          <a:effectRef idx="2">
-            <a:schemeClr val="accent1"/>
-          </a:effectRef>
-          <a:fontRef idx="minor">
-            <a:schemeClr val="lt1"/>
-          </a:fontRef>
-        </p:style>
-        <p:txBody>
-          <a:bodyPr rtlCol="0" anchor="ctr"/>
-          <a:lstStyle/>
-          <a:p>
-            <a:pPr algn="ctr"/>
-          </a:p>
-        </p:txBody>
-      </p:sp>
-      <p:sp>
-        <p:nvSpPr>
-          <p:cNvPr id="8" name="TextBox 7"/>
-          <p:cNvSpPr txBox="1"/>
-          <p:nvPr/>
-        </p:nvSpPr>
-        <p:spPr>
-          <a:xfrm>
-            <a:off x="914400" y="4114799"/>
-            <a:ext cx="4846320" cy="365760"/>
-          </a:xfrm>
-          <a:prstGeom prst="rect">
-            <a:avLst/>
-          </a:prstGeom>
-          <a:noFill/>
-        </p:spPr>
-        <p:txBody>
-          <a:bodyPr wrap="square" tIns="0" bIns="0" lIns="0" rIns="0">
-            <a:spAutoFit/>
-          </a:bodyPr>
-          <a:lstStyle/>
+                <a:latin typeface="Segoe UI"/>
+              </a:rPr>
+              <a:t>Farmers' Water User Associations (WUAs) co-managing water tables via the 'Smart Farmer Drainage' mobile app.</a:t>
+            </a:r>
+          </a:p>
           <a:p>
             <a:pPr algn="l">
-              <a:defRPr sz="1200" b="1">
-                <a:solidFill>
-                  <a:srgbClr val="F0C860"/>
-                </a:solidFill>
-              </a:defRPr>
-            </a:pPr>
-            <a:r>
-              <a:t>🛡️ 2. The Tampering Challenge &amp; Invisible Solution</a:t>
-            </a:r>
-          </a:p>
-        </p:txBody>
-      </p:sp>
-      <p:sp>
-        <p:nvSpPr>
-          <p:cNvPr id="9" name="TextBox 8"/>
-          <p:cNvSpPr txBox="1"/>
-          <p:nvPr/>
-        </p:nvSpPr>
-        <p:spPr>
-          <a:xfrm>
-            <a:off x="914400" y="4480559"/>
-            <a:ext cx="4846320" cy="1828800"/>
-          </a:xfrm>
-          <a:prstGeom prst="rect">
-            <a:avLst/>
-          </a:prstGeom>
-          <a:noFill/>
-        </p:spPr>
-        <p:txBody>
-          <a:bodyPr wrap="square" tIns="0" bIns="0" lIns="0" rIns="0">
-            <a:spAutoFit/>
-          </a:bodyPr>
-          <a:lstStyle/>
+              <a:lnSpc>
+                <a:spcPct val="125000"/>
+              </a:lnSpc>
+              <a:spcAft>
+                <a:spcPts val="600"/>
+              </a:spcAft>
+            </a:pPr>
+            <a:r>
+              <a:rPr sz="1150" b="1">
+                <a:solidFill>
+                  <a:srgbClr val="15B5A4"/>
+                </a:solidFill>
+                <a:latin typeface="Segoe UI"/>
+              </a:rPr>
+              <a:t>• Multi-Tier Governance Structure: </a:t>
+            </a:r>
+            <a:r>
+              <a:rPr sz="1150">
+                <a:solidFill>
+                  <a:srgbClr val="F8FAFC"/>
+                </a:solidFill>
+                <a:latin typeface="Segoe UI"/>
+              </a:rPr>
+              <a:t>Inter-Ministerial Steering Committee + dedicated PIU inside EPADP + Multi-Stakeholder Platforms in Kafr El-Sheikh.</a:t>
+            </a:r>
+          </a:p>
           <a:p>
             <a:pPr algn="l">
-              <a:defRPr sz="950">
+              <a:lnSpc>
+                <a:spcPct val="125000"/>
+              </a:lnSpc>
+              <a:spcAft>
+                <a:spcPts val="0"/>
+              </a:spcAft>
+            </a:pPr>
+            <a:r>
+              <a:rPr sz="1150" b="1">
+                <a:solidFill>
+                  <a:srgbClr val="15B5A4"/>
+                </a:solidFill>
+                <a:latin typeface="Segoe UI"/>
+              </a:rPr>
+              <a:t>• National Strategic Alignment: </a:t>
+            </a:r>
+            <a:r>
+              <a:rPr sz="1150">
                 <a:solidFill>
                   <a:srgbClr val="F8FAFC"/>
                 </a:solidFill>
-              </a:defRPr>
-            </a:pPr>
-            <a:r>
-              <a:t>• The Vulnerability: EPADP records show 25–40% of drainage failures stem from unauthorized farmer modifications (blocking manholes for rice or extracting drainage).</a:t>
-            </a:r>
-          </a:p>
-          <a:p>
-            <a:pPr algn="l">
-              <a:defRPr sz="950">
-                <a:solidFill>
-                  <a:srgbClr val="F8FAFC"/>
-                </a:solidFill>
-              </a:defRPr>
-            </a:pPr>
-            <a:r>
-              <a:t>• Eco-Drain Core Innovation: Replacing surface manholes with invisible chambers buried 30–50 cm underground, accessible only via RFID tags &amp; GPS.</a:t>
-            </a:r>
-          </a:p>
-          <a:p>
-            <a:pPr algn="l">
-              <a:defRPr sz="950">
-                <a:solidFill>
-                  <a:srgbClr val="F8FAFC"/>
-                </a:solidFill>
-              </a:defRPr>
-            </a:pPr>
-            <a:r>
-              <a:t>• Active Deterrence: Accelerometers detect digging (&gt;2.5g), triggering instant AES-128 GPS alerts via NB-IoT to control centers, stopping sabotage immediately.</a:t>
-            </a:r>
-          </a:p>
-        </p:txBody>
-      </p:sp>
-      <p:sp>
-        <p:nvSpPr>
-          <p:cNvPr id="10" name="Rounded Rectangle 9"/>
-          <p:cNvSpPr/>
-          <p:nvPr/>
-        </p:nvSpPr>
-        <p:spPr>
-          <a:xfrm>
-            <a:off x="6217920" y="1463040"/>
-            <a:ext cx="5242255" cy="4937760"/>
-          </a:xfrm>
-          <a:prstGeom prst="roundRect">
-            <a:avLst/>
-          </a:prstGeom>
-          <a:solidFill>
-            <a:srgbClr val="0F2240"/>
-          </a:solidFill>
-          <a:ln w="12700">
-            <a:solidFill>
-              <a:srgbClr val="15B5A4"/>
-            </a:solidFill>
-          </a:ln>
-        </p:spPr>
-        <p:style>
-          <a:lnRef idx="1">
-            <a:schemeClr val="accent1"/>
-          </a:lnRef>
-          <a:fillRef idx="3">
-            <a:schemeClr val="accent1"/>
-          </a:fillRef>
-          <a:effectRef idx="2">
-            <a:schemeClr val="accent1"/>
-          </a:effectRef>
-          <a:fontRef idx="minor">
-            <a:schemeClr val="lt1"/>
-          </a:fontRef>
-        </p:style>
-        <p:txBody>
-          <a:bodyPr rtlCol="0" anchor="ctr"/>
-          <a:lstStyle/>
-          <a:p>
-            <a:pPr algn="ctr"/>
-          </a:p>
-        </p:txBody>
-      </p:sp>
-      <p:sp>
-        <p:nvSpPr>
-          <p:cNvPr id="11" name="TextBox 10"/>
-          <p:cNvSpPr txBox="1"/>
-          <p:nvPr/>
-        </p:nvSpPr>
-        <p:spPr>
-          <a:xfrm>
-            <a:off x="6400800" y="1600200"/>
-            <a:ext cx="4876495" cy="365760"/>
-          </a:xfrm>
-          <a:prstGeom prst="rect">
-            <a:avLst/>
-          </a:prstGeom>
-          <a:noFill/>
-        </p:spPr>
-        <p:txBody>
-          <a:bodyPr wrap="square" tIns="0" bIns="0" lIns="0" rIns="0">
-            <a:spAutoFit/>
-          </a:bodyPr>
-          <a:lstStyle/>
-          <a:p>
-            <a:pPr algn="l">
-              <a:defRPr sz="1200" b="1">
-                <a:solidFill>
-                  <a:srgbClr val="15B5A4"/>
-                </a:solidFill>
-              </a:defRPr>
-            </a:pPr>
-            <a:r>
-              <a:t>🏛️ 3. Lead Institution, Key Partners &amp; Governance Structure</a:t>
-            </a:r>
-          </a:p>
-        </p:txBody>
-      </p:sp>
-      <p:sp>
-        <p:nvSpPr>
-          <p:cNvPr id="12" name="TextBox 11"/>
-          <p:cNvSpPr txBox="1"/>
-          <p:nvPr/>
-        </p:nvSpPr>
-        <p:spPr>
-          <a:xfrm>
-            <a:off x="6400800" y="1965960"/>
-            <a:ext cx="4876495" cy="4343400"/>
-          </a:xfrm>
-          <a:prstGeom prst="rect">
-            <a:avLst/>
-          </a:prstGeom>
-          <a:noFill/>
-        </p:spPr>
-        <p:txBody>
-          <a:bodyPr wrap="square" tIns="0" bIns="0" lIns="0" rIns="0">
-            <a:spAutoFit/>
-          </a:bodyPr>
-          <a:lstStyle/>
-          <a:p>
-            <a:pPr algn="l">
-              <a:defRPr sz="1000" b="1">
-                <a:solidFill>
-                  <a:srgbClr val="F0C860"/>
-                </a:solidFill>
-              </a:defRPr>
-            </a:pPr>
-            <a:r>
-              <a:t>• Lead Executive Institution: Ministry of Water Resources and Irrigation (MWRI) / Egyptian Public Authority for Drainage Projects (EPADP - Technical Office Lower Egypt).</a:t>
-            </a:r>
-          </a:p>
-          <a:p>
-            <a:pPr algn="l">
-              <a:defRPr sz="900">
-                <a:solidFill>
-                  <a:srgbClr val="F8FAFC"/>
-                </a:solidFill>
-              </a:defRPr>
-            </a:pPr>
-            <a:r>
-              <a:t>• Key Technical Partners: Drainage Research Institute (DRI - NWRC) for soil telemetry, hydraulic criteria &amp; independent MRV verification.</a:t>
-            </a:r>
-          </a:p>
-          <a:p>
-            <a:pPr algn="l">
-              <a:defRPr sz="900">
-                <a:solidFill>
-                  <a:srgbClr val="F8FAFC"/>
-                </a:solidFill>
-              </a:defRPr>
-            </a:pPr>
-            <a:r>
-              <a:t>• Energy &amp; Regulatory Partner: New &amp; Renewable Energy Authority (NREA) &amp; EgyptERA for 50 MW net-metering grid interconnection.</a:t>
-            </a:r>
-          </a:p>
-          <a:p>
-            <a:pPr algn="l">
-              <a:defRPr sz="900">
-                <a:solidFill>
-                  <a:srgbClr val="F8FAFC"/>
-                </a:solidFill>
-              </a:defRPr>
-            </a:pPr>
-            <a:r>
-              <a:t>• Agricultural Extension: Ministry of Agriculture &amp; Land Reclamation (MALR) for crop yield monitoring &amp; farmer advisory.</a:t>
-            </a:r>
-          </a:p>
-          <a:p>
-            <a:pPr algn="l">
-              <a:defRPr sz="900">
-                <a:solidFill>
-                  <a:srgbClr val="F8FAFC"/>
-                </a:solidFill>
-              </a:defRPr>
-            </a:pPr>
-            <a:r>
-              <a:t>• Local Governance &amp; Ownership: Farmers' Water User Associations (WUAs) co-managing water tables via the 'Smart Farmer' mobile app.</a:t>
-            </a:r>
-          </a:p>
-          <a:p>
-            <a:pPr algn="l">
-              <a:defRPr sz="900">
-                <a:solidFill>
-                  <a:srgbClr val="F8FAFC"/>
-                </a:solidFill>
-              </a:defRPr>
-            </a:pPr>
-            <a:r>
-              <a:t>• Multi-Tier Governance Structure: • Steering Committee: Inter-ministerial oversight (MWRI, MALR, MoE, MoF).</a:t>
-            </a:r>
-            <a:br/>
-            <a:r>
-              <a:t>• Dedicated PIU: Project Implementation Unit inside EPADP.</a:t>
-            </a:r>
-            <a:br/>
-            <a:r>
-              <a:t>• Multi-Stakeholder Platform: Local WUA committees in Kafr El-Sheikh &amp; Dakahlia.</a:t>
-            </a:r>
-          </a:p>
-          <a:p>
-            <a:pPr algn="l">
-              <a:defRPr sz="900">
-                <a:solidFill>
-                  <a:srgbClr val="F8FAFC"/>
-                </a:solidFill>
-              </a:defRPr>
-            </a:pPr>
-            <a:r>
-              <a:t>• Strategic Alignment: Fully aligned with MWRI Water &amp; Irrigation System 2.0 (Presidential Initiative), Egypt Vision 2030, and National Climate Change Strategy 2050.</a:t>
+                <a:latin typeface="Segoe UI"/>
+              </a:rPr>
+              <a:t>Fully aligned with Presidential Initiative 'Irrigation 2.0', Egypt Vision 2030, and National Climate Strategy 2050.</a:t>
             </a:r>
           </a:p>
         </p:txBody>
@@ -3728,14 +4178,116 @@
       </p:sp>
       <p:sp>
         <p:nvSpPr>
-          <p:cNvPr id="3" name="TextBox 2"/>
+          <p:cNvPr id="3" name="Rounded Rectangle 2"/>
+          <p:cNvSpPr/>
+          <p:nvPr/>
+        </p:nvSpPr>
+        <p:spPr>
+          <a:xfrm>
+            <a:off x="731520" y="146304"/>
+            <a:ext cx="10728655" cy="36576"/>
+          </a:xfrm>
+          <a:prstGeom prst="roundRect">
+            <a:avLst>
+              <a:gd name="adj" fmla="val 50000"/>
+            </a:avLst>
+          </a:prstGeom>
+          <a:solidFill>
+            <a:srgbClr val="15B5A4"/>
+          </a:solidFill>
+          <a:ln>
+            <a:noFill/>
+          </a:ln>
+        </p:spPr>
+        <p:style>
+          <a:lnRef idx="1">
+            <a:schemeClr val="accent1"/>
+          </a:lnRef>
+          <a:fillRef idx="3">
+            <a:schemeClr val="accent1"/>
+          </a:fillRef>
+          <a:effectRef idx="2">
+            <a:schemeClr val="accent1"/>
+          </a:effectRef>
+          <a:fontRef idx="minor">
+            <a:schemeClr val="lt1"/>
+          </a:fontRef>
+        </p:style>
+        <p:txBody>
+          <a:bodyPr rtlCol="0" anchor="ctr"/>
+          <a:lstStyle/>
+          <a:p>
+            <a:pPr algn="ctr"/>
+          </a:p>
+        </p:txBody>
+      </p:sp>
+      <p:sp>
+        <p:nvSpPr>
+          <p:cNvPr id="4" name="Rounded Rectangle 3"/>
+          <p:cNvSpPr/>
+          <p:nvPr/>
+        </p:nvSpPr>
+        <p:spPr>
+          <a:xfrm>
+            <a:off x="731520" y="292608"/>
+            <a:ext cx="4846320" cy="292608"/>
+          </a:xfrm>
+          <a:prstGeom prst="roundRect">
+            <a:avLst>
+              <a:gd name="adj" fmla="val 50000"/>
+            </a:avLst>
+          </a:prstGeom>
+          <a:solidFill>
+            <a:srgbClr val="162D52"/>
+          </a:solidFill>
+          <a:ln w="15240">
+            <a:solidFill>
+              <a:srgbClr val="15B5A4"/>
+            </a:solidFill>
+          </a:ln>
+        </p:spPr>
+        <p:style>
+          <a:lnRef idx="1">
+            <a:schemeClr val="accent1"/>
+          </a:lnRef>
+          <a:fillRef idx="3">
+            <a:schemeClr val="accent1"/>
+          </a:fillRef>
+          <a:effectRef idx="2">
+            <a:schemeClr val="accent1"/>
+          </a:effectRef>
+          <a:fontRef idx="minor">
+            <a:schemeClr val="lt1"/>
+          </a:fontRef>
+        </p:style>
+        <p:txBody>
+          <a:bodyPr rtlCol="0" anchor="ctr" wrap="none" tIns="0" bIns="0" lIns="0" rIns="0"/>
+          <a:lstStyle/>
+          <a:p>
+            <a:pPr algn="ctr">
+              <a:defRPr sz="1050" b="1">
+                <a:solidFill>
+                  <a:srgbClr val="15B5A4"/>
+                </a:solidFill>
+                <a:latin typeface="Segoe UI"/>
+              </a:defRPr>
+            </a:pPr>
+            <a:r>
+              <a:t>SLIDE 2 OF 3 | 5-MIN EXECUTIVE PITCH | CLIMATE RESILIENT WEFE</a:t>
+            </a:r>
+          </a:p>
+        </p:txBody>
+      </p:sp>
+      <p:sp>
+        <p:nvSpPr>
+          <p:cNvPr id="5" name="TextBox 4"/>
           <p:cNvSpPr txBox="1"/>
           <p:nvPr/>
         </p:nvSpPr>
         <p:spPr>
           <a:xfrm>
-            <a:off x="731520" y="365760"/>
-            <a:ext cx="10728655" cy="1051560"/>
+            <a:off x="731520" y="658368"/>
+            <a:ext cx="10728655" cy="804672"/>
           </a:xfrm>
           <a:prstGeom prst="rect">
             <a:avLst/>
@@ -3749,58 +4301,796 @@
           <a:lstStyle/>
           <a:p>
             <a:pPr algn="l">
-              <a:defRPr sz="950" b="1">
-                <a:solidFill>
-                  <a:srgbClr val="15B5A4"/>
-                </a:solidFill>
+              <a:lnSpc>
+                <a:spcPct val="115000"/>
+              </a:lnSpc>
+              <a:defRPr sz="2200" b="1">
+                <a:solidFill>
+                  <a:srgbClr val="F8FAFC"/>
+                </a:solidFill>
+                <a:latin typeface="Segoe UI"/>
               </a:defRPr>
             </a:pPr>
             <a:r>
-              <a:t>SLIDE 2 OF 3 | 5-MIN EXECUTIVE PITCH | WEFE NEXUS PROFESSIONAL SERIES</a:t>
+              <a:t>Integrated WEFE Interventions, Nexus Value &amp; Resilience Scorecard</a:t>
             </a:r>
           </a:p>
           <a:p>
             <a:pPr algn="l">
-              <a:defRPr sz="1900" b="1">
-                <a:solidFill>
-                  <a:srgbClr val="F8FAFC"/>
-                </a:solidFill>
+              <a:lnSpc>
+                <a:spcPct val="120000"/>
+              </a:lnSpc>
+              <a:defRPr sz="1200">
+                <a:solidFill>
+                  <a:srgbClr val="F0C860"/>
+                </a:solidFill>
+                <a:latin typeface="Segoe UI"/>
               </a:defRPr>
             </a:pPr>
             <a:r>
-              <a:t>Integrated WEFE Interventions, Nexus Value &amp; Resilience Scorecard</a:t>
-            </a:r>
-          </a:p>
-          <a:p>
-            <a:pPr algn="l">
-              <a:defRPr sz="1100">
-                <a:solidFill>
-                  <a:srgbClr val="F0C860"/>
-                </a:solidFill>
-              </a:defRPr>
-            </a:pPr>
-            <a:r>
-              <a:t>2. Main WEFE Interventions &amp; Closed-Loop Benefits | Feedback Report Corrections: Screening Matrix, Ecosystem &amp; Bankability</a:t>
-            </a:r>
-          </a:p>
-        </p:txBody>
-      </p:sp>
-      <p:sp>
-        <p:nvSpPr>
-          <p:cNvPr id="4" name="Rounded Rectangle 3"/>
+              <a:t>2. The 4 Closed-Loop Interventions | Feedback Corrections: Screening Matrix, Blue Carbon &amp; Bankability</a:t>
+            </a:r>
+          </a:p>
+        </p:txBody>
+      </p:sp>
+      <p:sp>
+        <p:nvSpPr>
+          <p:cNvPr id="6" name="Rounded Rectangle 5"/>
           <p:cNvSpPr/>
           <p:nvPr/>
         </p:nvSpPr>
         <p:spPr>
           <a:xfrm>
-            <a:off x="731520" y="1463040"/>
-            <a:ext cx="10728655" cy="2468880"/>
+            <a:off x="731520" y="1536192"/>
+            <a:ext cx="2532888" cy="2395728"/>
           </a:xfrm>
           <a:prstGeom prst="roundRect">
-            <a:avLst/>
+            <a:avLst>
+              <a:gd name="adj" fmla="val 9000"/>
+            </a:avLst>
           </a:prstGeom>
           <a:solidFill>
             <a:srgbClr val="0F2240"/>
+          </a:solidFill>
+          <a:ln w="15240">
+            <a:solidFill>
+              <a:srgbClr val="3B82F6"/>
+            </a:solidFill>
+          </a:ln>
+        </p:spPr>
+        <p:style>
+          <a:lnRef idx="1">
+            <a:schemeClr val="accent1"/>
+          </a:lnRef>
+          <a:fillRef idx="3">
+            <a:schemeClr val="accent1"/>
+          </a:fillRef>
+          <a:effectRef idx="2">
+            <a:schemeClr val="accent1"/>
+          </a:effectRef>
+          <a:fontRef idx="minor">
+            <a:schemeClr val="lt1"/>
+          </a:fontRef>
+        </p:style>
+        <p:txBody>
+          <a:bodyPr rtlCol="0" anchor="ctr"/>
+          <a:lstStyle/>
+          <a:p>
+            <a:pPr algn="ctr"/>
+          </a:p>
+        </p:txBody>
+      </p:sp>
+      <p:sp>
+        <p:nvSpPr>
+          <p:cNvPr id="7" name="TextBox 6"/>
+          <p:cNvSpPr txBox="1"/>
+          <p:nvPr/>
+        </p:nvSpPr>
+        <p:spPr>
+          <a:xfrm>
+            <a:off x="932688" y="1645920"/>
+            <a:ext cx="2130552" cy="347472"/>
+          </a:xfrm>
+          <a:prstGeom prst="rect">
+            <a:avLst/>
+          </a:prstGeom>
+          <a:noFill/>
+        </p:spPr>
+        <p:txBody>
+          <a:bodyPr wrap="square" tIns="0" bIns="0" lIns="0" rIns="0">
+            <a:spAutoFit/>
+          </a:bodyPr>
+          <a:lstStyle/>
+          <a:p>
+            <a:pPr algn="l">
+              <a:defRPr sz="1450" b="1">
+                <a:solidFill>
+                  <a:srgbClr val="3B82F6"/>
+                </a:solidFill>
+                <a:latin typeface="Segoe UI"/>
+              </a:defRPr>
+            </a:pPr>
+            <a:r>
+              <a:t>💧 WATER</a:t>
+            </a:r>
+          </a:p>
+        </p:txBody>
+      </p:sp>
+      <p:sp>
+        <p:nvSpPr>
+          <p:cNvPr id="8" name="Rounded Rectangle 7"/>
+          <p:cNvSpPr/>
+          <p:nvPr/>
+        </p:nvSpPr>
+        <p:spPr>
+          <a:xfrm>
+            <a:off x="914400" y="1975104"/>
+            <a:ext cx="2167128" cy="310896"/>
+          </a:xfrm>
+          <a:prstGeom prst="roundRect">
+            <a:avLst>
+              <a:gd name="adj" fmla="val 35000"/>
+            </a:avLst>
+          </a:prstGeom>
+          <a:solidFill>
+            <a:srgbClr val="162D52"/>
+          </a:solidFill>
+          <a:ln w="12700">
+            <a:solidFill>
+              <a:srgbClr val="3B82F6"/>
+            </a:solidFill>
+          </a:ln>
+        </p:spPr>
+        <p:style>
+          <a:lnRef idx="1">
+            <a:schemeClr val="accent1"/>
+          </a:lnRef>
+          <a:fillRef idx="3">
+            <a:schemeClr val="accent1"/>
+          </a:fillRef>
+          <a:effectRef idx="2">
+            <a:schemeClr val="accent1"/>
+          </a:effectRef>
+          <a:fontRef idx="minor">
+            <a:schemeClr val="lt1"/>
+          </a:fontRef>
+        </p:style>
+        <p:txBody>
+          <a:bodyPr rtlCol="0" anchor="ctr" wrap="square" tIns="0" bIns="0" lIns="0" rIns="0"/>
+          <a:lstStyle/>
+          <a:p>
+            <a:pPr algn="l">
+              <a:defRPr sz="1150" b="1">
+                <a:solidFill>
+                  <a:srgbClr val="F0C860"/>
+                </a:solidFill>
+                <a:latin typeface="Segoe UI"/>
+              </a:defRPr>
+            </a:pPr>
+            <a:r>
+              <a:t> 150M m³/yr Saved (25-30%) </a:t>
+            </a:r>
+          </a:p>
+        </p:txBody>
+      </p:sp>
+      <p:sp>
+        <p:nvSpPr>
+          <p:cNvPr id="9" name="TextBox 8"/>
+          <p:cNvSpPr txBox="1"/>
+          <p:nvPr/>
+        </p:nvSpPr>
+        <p:spPr>
+          <a:xfrm>
+            <a:off x="932688" y="2340864"/>
+            <a:ext cx="2130552" cy="1499616"/>
+          </a:xfrm>
+          <a:prstGeom prst="rect">
+            <a:avLst/>
+          </a:prstGeom>
+          <a:noFill/>
+        </p:spPr>
+        <p:txBody>
+          <a:bodyPr wrap="square" tIns="0" bIns="0" lIns="0" rIns="0">
+            <a:spAutoFit/>
+          </a:bodyPr>
+          <a:lstStyle/>
+          <a:p>
+            <a:pPr algn="l">
+              <a:lnSpc>
+                <a:spcPct val="125000"/>
+              </a:lnSpc>
+              <a:spcAft>
+                <a:spcPts val="500"/>
+              </a:spcAft>
+            </a:pPr>
+            <a:r>
+              <a:rPr sz="1100" b="1">
+                <a:solidFill>
+                  <a:srgbClr val="3B82F6"/>
+                </a:solidFill>
+                <a:latin typeface="Segoe UI"/>
+              </a:rPr>
+              <a:t>• Tech: </a:t>
+            </a:r>
+            <a:r>
+              <a:rPr sz="1100">
+                <a:solidFill>
+                  <a:srgbClr val="F8FAFC"/>
+                </a:solidFill>
+                <a:latin typeface="Segoe UI"/>
+              </a:rPr>
+              <a:t>Retrofit 100k feddans with HDPE &amp; geotextile filters (40+ yr design life).</a:t>
+            </a:r>
+          </a:p>
+          <a:p>
+            <a:pPr algn="l">
+              <a:lnSpc>
+                <a:spcPct val="125000"/>
+              </a:lnSpc>
+              <a:spcAft>
+                <a:spcPts val="0"/>
+              </a:spcAft>
+            </a:pPr>
+            <a:r>
+              <a:rPr sz="1100" b="1">
+                <a:solidFill>
+                  <a:srgbClr val="3B82F6"/>
+                </a:solidFill>
+                <a:latin typeface="Segoe UI"/>
+              </a:rPr>
+              <a:t>• Control: </a:t>
+            </a:r>
+            <a:r>
+              <a:rPr sz="1100">
+                <a:solidFill>
+                  <a:srgbClr val="F8FAFC"/>
+                </a:solidFill>
+                <a:latin typeface="Segoe UI"/>
+              </a:rPr>
+              <a:t>Smart gate valves regulate water table, leveraging natural capillary rise.</a:t>
+            </a:r>
+          </a:p>
+        </p:txBody>
+      </p:sp>
+      <p:sp>
+        <p:nvSpPr>
+          <p:cNvPr id="10" name="Rounded Rectangle 9"/>
+          <p:cNvSpPr/>
+          <p:nvPr/>
+        </p:nvSpPr>
+        <p:spPr>
+          <a:xfrm>
+            <a:off x="3456432" y="1536192"/>
+            <a:ext cx="2532888" cy="2395728"/>
+          </a:xfrm>
+          <a:prstGeom prst="roundRect">
+            <a:avLst>
+              <a:gd name="adj" fmla="val 9000"/>
+            </a:avLst>
+          </a:prstGeom>
+          <a:solidFill>
+            <a:srgbClr val="0F2240"/>
+          </a:solidFill>
+          <a:ln w="15240">
+            <a:solidFill>
+              <a:srgbClr val="F0C860"/>
+            </a:solidFill>
+          </a:ln>
+        </p:spPr>
+        <p:style>
+          <a:lnRef idx="1">
+            <a:schemeClr val="accent1"/>
+          </a:lnRef>
+          <a:fillRef idx="3">
+            <a:schemeClr val="accent1"/>
+          </a:fillRef>
+          <a:effectRef idx="2">
+            <a:schemeClr val="accent1"/>
+          </a:effectRef>
+          <a:fontRef idx="minor">
+            <a:schemeClr val="lt1"/>
+          </a:fontRef>
+        </p:style>
+        <p:txBody>
+          <a:bodyPr rtlCol="0" anchor="ctr"/>
+          <a:lstStyle/>
+          <a:p>
+            <a:pPr algn="ctr"/>
+          </a:p>
+        </p:txBody>
+      </p:sp>
+      <p:sp>
+        <p:nvSpPr>
+          <p:cNvPr id="11" name="TextBox 10"/>
+          <p:cNvSpPr txBox="1"/>
+          <p:nvPr/>
+        </p:nvSpPr>
+        <p:spPr>
+          <a:xfrm>
+            <a:off x="3657600" y="1645920"/>
+            <a:ext cx="2130552" cy="347472"/>
+          </a:xfrm>
+          <a:prstGeom prst="rect">
+            <a:avLst/>
+          </a:prstGeom>
+          <a:noFill/>
+        </p:spPr>
+        <p:txBody>
+          <a:bodyPr wrap="square" tIns="0" bIns="0" lIns="0" rIns="0">
+            <a:spAutoFit/>
+          </a:bodyPr>
+          <a:lstStyle/>
+          <a:p>
+            <a:pPr algn="l">
+              <a:defRPr sz="1450" b="1">
+                <a:solidFill>
+                  <a:srgbClr val="F0C860"/>
+                </a:solidFill>
+                <a:latin typeface="Segoe UI"/>
+              </a:defRPr>
+            </a:pPr>
+            <a:r>
+              <a:t>☀️ ENERGY</a:t>
+            </a:r>
+          </a:p>
+        </p:txBody>
+      </p:sp>
+      <p:sp>
+        <p:nvSpPr>
+          <p:cNvPr id="12" name="Rounded Rectangle 11"/>
+          <p:cNvSpPr/>
+          <p:nvPr/>
+        </p:nvSpPr>
+        <p:spPr>
+          <a:xfrm>
+            <a:off x="3639312" y="1975104"/>
+            <a:ext cx="2167128" cy="310896"/>
+          </a:xfrm>
+          <a:prstGeom prst="roundRect">
+            <a:avLst>
+              <a:gd name="adj" fmla="val 35000"/>
+            </a:avLst>
+          </a:prstGeom>
+          <a:solidFill>
+            <a:srgbClr val="162D52"/>
+          </a:solidFill>
+          <a:ln w="12700">
+            <a:solidFill>
+              <a:srgbClr val="F0C860"/>
+            </a:solidFill>
+          </a:ln>
+        </p:spPr>
+        <p:style>
+          <a:lnRef idx="1">
+            <a:schemeClr val="accent1"/>
+          </a:lnRef>
+          <a:fillRef idx="3">
+            <a:schemeClr val="accent1"/>
+          </a:fillRef>
+          <a:effectRef idx="2">
+            <a:schemeClr val="accent1"/>
+          </a:effectRef>
+          <a:fontRef idx="minor">
+            <a:schemeClr val="lt1"/>
+          </a:fontRef>
+        </p:style>
+        <p:txBody>
+          <a:bodyPr rtlCol="0" anchor="ctr" wrap="square" tIns="0" bIns="0" lIns="0" rIns="0"/>
+          <a:lstStyle/>
+          <a:p>
+            <a:pPr algn="l">
+              <a:defRPr sz="1150" b="1">
+                <a:solidFill>
+                  <a:srgbClr val="F0C860"/>
+                </a:solidFill>
+                <a:latin typeface="Segoe UI"/>
+              </a:defRPr>
+            </a:pPr>
+            <a:r>
+              <a:t> 50 MW Solar PV | 90 GWh/yr </a:t>
+            </a:r>
+          </a:p>
+        </p:txBody>
+      </p:sp>
+      <p:sp>
+        <p:nvSpPr>
+          <p:cNvPr id="13" name="TextBox 12"/>
+          <p:cNvSpPr txBox="1"/>
+          <p:nvPr/>
+        </p:nvSpPr>
+        <p:spPr>
+          <a:xfrm>
+            <a:off x="3657600" y="2340864"/>
+            <a:ext cx="2130552" cy="1499616"/>
+          </a:xfrm>
+          <a:prstGeom prst="rect">
+            <a:avLst/>
+          </a:prstGeom>
+          <a:noFill/>
+        </p:spPr>
+        <p:txBody>
+          <a:bodyPr wrap="square" tIns="0" bIns="0" lIns="0" rIns="0">
+            <a:spAutoFit/>
+          </a:bodyPr>
+          <a:lstStyle/>
+          <a:p>
+            <a:pPr algn="l">
+              <a:lnSpc>
+                <a:spcPct val="125000"/>
+              </a:lnSpc>
+              <a:spcAft>
+                <a:spcPts val="500"/>
+              </a:spcAft>
+            </a:pPr>
+            <a:r>
+              <a:rPr sz="1100" b="1">
+                <a:solidFill>
+                  <a:srgbClr val="F0C860"/>
+                </a:solidFill>
+                <a:latin typeface="Segoe UI"/>
+              </a:rPr>
+              <a:t>• Integration: </a:t>
+            </a:r>
+            <a:r>
+              <a:rPr sz="1100">
+                <a:solidFill>
+                  <a:srgbClr val="F8FAFC"/>
+                </a:solidFill>
+                <a:latin typeface="Segoe UI"/>
+              </a:rPr>
+              <a:t>Distributed solar across 25 pump stations powering lift pumps.</a:t>
+            </a:r>
+          </a:p>
+          <a:p>
+            <a:pPr algn="l">
+              <a:lnSpc>
+                <a:spcPct val="125000"/>
+              </a:lnSpc>
+              <a:spcAft>
+                <a:spcPts val="0"/>
+              </a:spcAft>
+            </a:pPr>
+            <a:r>
+              <a:rPr sz="1100" b="1">
+                <a:solidFill>
+                  <a:srgbClr val="F0C860"/>
+                </a:solidFill>
+                <a:latin typeface="Segoe UI"/>
+              </a:rPr>
+              <a:t>• Grid Export: </a:t>
+            </a:r>
+            <a:r>
+              <a:rPr sz="1100">
+                <a:solidFill>
+                  <a:srgbClr val="F8FAFC"/>
+                </a:solidFill>
+                <a:latin typeface="Segoe UI"/>
+              </a:rPr>
+              <a:t>Cuts 40% electricity bill; surplus exported via Net Metering to grid.</a:t>
+            </a:r>
+          </a:p>
+        </p:txBody>
+      </p:sp>
+      <p:sp>
+        <p:nvSpPr>
+          <p:cNvPr id="14" name="Rounded Rectangle 13"/>
+          <p:cNvSpPr/>
+          <p:nvPr/>
+        </p:nvSpPr>
+        <p:spPr>
+          <a:xfrm>
+            <a:off x="6181344" y="1536192"/>
+            <a:ext cx="2532888" cy="2395728"/>
+          </a:xfrm>
+          <a:prstGeom prst="roundRect">
+            <a:avLst>
+              <a:gd name="adj" fmla="val 9000"/>
+            </a:avLst>
+          </a:prstGeom>
+          <a:solidFill>
+            <a:srgbClr val="0F2240"/>
+          </a:solidFill>
+          <a:ln w="15240">
+            <a:solidFill>
+              <a:srgbClr val="10B981"/>
+            </a:solidFill>
+          </a:ln>
+        </p:spPr>
+        <p:style>
+          <a:lnRef idx="1">
+            <a:schemeClr val="accent1"/>
+          </a:lnRef>
+          <a:fillRef idx="3">
+            <a:schemeClr val="accent1"/>
+          </a:fillRef>
+          <a:effectRef idx="2">
+            <a:schemeClr val="accent1"/>
+          </a:effectRef>
+          <a:fontRef idx="minor">
+            <a:schemeClr val="lt1"/>
+          </a:fontRef>
+        </p:style>
+        <p:txBody>
+          <a:bodyPr rtlCol="0" anchor="ctr"/>
+          <a:lstStyle/>
+          <a:p>
+            <a:pPr algn="ctr"/>
+          </a:p>
+        </p:txBody>
+      </p:sp>
+      <p:sp>
+        <p:nvSpPr>
+          <p:cNvPr id="15" name="TextBox 14"/>
+          <p:cNvSpPr txBox="1"/>
+          <p:nvPr/>
+        </p:nvSpPr>
+        <p:spPr>
+          <a:xfrm>
+            <a:off x="6382512" y="1645920"/>
+            <a:ext cx="2130552" cy="347472"/>
+          </a:xfrm>
+          <a:prstGeom prst="rect">
+            <a:avLst/>
+          </a:prstGeom>
+          <a:noFill/>
+        </p:spPr>
+        <p:txBody>
+          <a:bodyPr wrap="square" tIns="0" bIns="0" lIns="0" rIns="0">
+            <a:spAutoFit/>
+          </a:bodyPr>
+          <a:lstStyle/>
+          <a:p>
+            <a:pPr algn="l">
+              <a:defRPr sz="1450" b="1">
+                <a:solidFill>
+                  <a:srgbClr val="10B981"/>
+                </a:solidFill>
+                <a:latin typeface="Segoe UI"/>
+              </a:defRPr>
+            </a:pPr>
+            <a:r>
+              <a:t>🌾 FOOD</a:t>
+            </a:r>
+          </a:p>
+        </p:txBody>
+      </p:sp>
+      <p:sp>
+        <p:nvSpPr>
+          <p:cNvPr id="16" name="Rounded Rectangle 15"/>
+          <p:cNvSpPr/>
+          <p:nvPr/>
+        </p:nvSpPr>
+        <p:spPr>
+          <a:xfrm>
+            <a:off x="6364224" y="1975104"/>
+            <a:ext cx="2167128" cy="310896"/>
+          </a:xfrm>
+          <a:prstGeom prst="roundRect">
+            <a:avLst>
+              <a:gd name="adj" fmla="val 35000"/>
+            </a:avLst>
+          </a:prstGeom>
+          <a:solidFill>
+            <a:srgbClr val="162D52"/>
+          </a:solidFill>
+          <a:ln w="12700">
+            <a:solidFill>
+              <a:srgbClr val="10B981"/>
+            </a:solidFill>
+          </a:ln>
+        </p:spPr>
+        <p:style>
+          <a:lnRef idx="1">
+            <a:schemeClr val="accent1"/>
+          </a:lnRef>
+          <a:fillRef idx="3">
+            <a:schemeClr val="accent1"/>
+          </a:fillRef>
+          <a:effectRef idx="2">
+            <a:schemeClr val="accent1"/>
+          </a:effectRef>
+          <a:fontRef idx="minor">
+            <a:schemeClr val="lt1"/>
+          </a:fontRef>
+        </p:style>
+        <p:txBody>
+          <a:bodyPr rtlCol="0" anchor="ctr" wrap="square" tIns="0" bIns="0" lIns="0" rIns="0"/>
+          <a:lstStyle/>
+          <a:p>
+            <a:pPr algn="l">
+              <a:defRPr sz="1150" b="1">
+                <a:solidFill>
+                  <a:srgbClr val="F0C860"/>
+                </a:solidFill>
+                <a:latin typeface="Segoe UI"/>
+              </a:defRPr>
+            </a:pPr>
+            <a:r>
+              <a:t> +15-25% Yield Boost </a:t>
+            </a:r>
+          </a:p>
+        </p:txBody>
+      </p:sp>
+      <p:sp>
+        <p:nvSpPr>
+          <p:cNvPr id="17" name="TextBox 16"/>
+          <p:cNvSpPr txBox="1"/>
+          <p:nvPr/>
+        </p:nvSpPr>
+        <p:spPr>
+          <a:xfrm>
+            <a:off x="6382512" y="2340864"/>
+            <a:ext cx="2130552" cy="1499616"/>
+          </a:xfrm>
+          <a:prstGeom prst="rect">
+            <a:avLst/>
+          </a:prstGeom>
+          <a:noFill/>
+        </p:spPr>
+        <p:txBody>
+          <a:bodyPr wrap="square" tIns="0" bIns="0" lIns="0" rIns="0">
+            <a:spAutoFit/>
+          </a:bodyPr>
+          <a:lstStyle/>
+          <a:p>
+            <a:pPr algn="l">
+              <a:lnSpc>
+                <a:spcPct val="125000"/>
+              </a:lnSpc>
+              <a:spcAft>
+                <a:spcPts val="500"/>
+              </a:spcAft>
+            </a:pPr>
+            <a:r>
+              <a:rPr sz="1100" b="1">
+                <a:solidFill>
+                  <a:srgbClr val="10B981"/>
+                </a:solidFill>
+                <a:latin typeface="Segoe UI"/>
+              </a:rPr>
+              <a:t>• Crops: </a:t>
+            </a:r>
+            <a:r>
+              <a:rPr sz="1100">
+                <a:solidFill>
+                  <a:srgbClr val="F8FAFC"/>
+                </a:solidFill>
+                <a:latin typeface="Segoe UI"/>
+              </a:rPr>
+              <a:t>Restores yields for wheat, maize, and rice by mitigating root waterlogging.</a:t>
+            </a:r>
+          </a:p>
+          <a:p>
+            <a:pPr algn="l">
+              <a:lnSpc>
+                <a:spcPct val="125000"/>
+              </a:lnSpc>
+              <a:spcAft>
+                <a:spcPts val="0"/>
+              </a:spcAft>
+            </a:pPr>
+            <a:r>
+              <a:rPr sz="1100" b="1">
+                <a:solidFill>
+                  <a:srgbClr val="10B981"/>
+                </a:solidFill>
+                <a:latin typeface="Segoe UI"/>
+              </a:rPr>
+              <a:t>• Auto-Flushing: </a:t>
+            </a:r>
+            <a:r>
+              <a:rPr sz="1100">
+                <a:solidFill>
+                  <a:srgbClr val="F8FAFC"/>
+                </a:solidFill>
+                <a:latin typeface="Segoe UI"/>
+              </a:rPr>
+              <a:t>EC probes trigger automated flushing when EC &gt; 4 dS/m; close at &lt; 2 dS/m.</a:t>
+            </a:r>
+          </a:p>
+        </p:txBody>
+      </p:sp>
+      <p:sp>
+        <p:nvSpPr>
+          <p:cNvPr id="18" name="Rounded Rectangle 17"/>
+          <p:cNvSpPr/>
+          <p:nvPr/>
+        </p:nvSpPr>
+        <p:spPr>
+          <a:xfrm>
+            <a:off x="8906256" y="1536192"/>
+            <a:ext cx="2532888" cy="2395728"/>
+          </a:xfrm>
+          <a:prstGeom prst="roundRect">
+            <a:avLst>
+              <a:gd name="adj" fmla="val 9000"/>
+            </a:avLst>
+          </a:prstGeom>
+          <a:solidFill>
+            <a:srgbClr val="0F2240"/>
+          </a:solidFill>
+          <a:ln w="15240">
+            <a:solidFill>
+              <a:srgbClr val="15B5A4"/>
+            </a:solidFill>
+          </a:ln>
+        </p:spPr>
+        <p:style>
+          <a:lnRef idx="1">
+            <a:schemeClr val="accent1"/>
+          </a:lnRef>
+          <a:fillRef idx="3">
+            <a:schemeClr val="accent1"/>
+          </a:fillRef>
+          <a:effectRef idx="2">
+            <a:schemeClr val="accent1"/>
+          </a:effectRef>
+          <a:fontRef idx="minor">
+            <a:schemeClr val="lt1"/>
+          </a:fontRef>
+        </p:style>
+        <p:txBody>
+          <a:bodyPr rtlCol="0" anchor="ctr"/>
+          <a:lstStyle/>
+          <a:p>
+            <a:pPr algn="ctr"/>
+          </a:p>
+        </p:txBody>
+      </p:sp>
+      <p:sp>
+        <p:nvSpPr>
+          <p:cNvPr id="19" name="TextBox 18"/>
+          <p:cNvSpPr txBox="1"/>
+          <p:nvPr/>
+        </p:nvSpPr>
+        <p:spPr>
+          <a:xfrm>
+            <a:off x="9107424" y="1645920"/>
+            <a:ext cx="2130552" cy="347472"/>
+          </a:xfrm>
+          <a:prstGeom prst="rect">
+            <a:avLst/>
+          </a:prstGeom>
+          <a:noFill/>
+        </p:spPr>
+        <p:txBody>
+          <a:bodyPr wrap="square" tIns="0" bIns="0" lIns="0" rIns="0">
+            <a:spAutoFit/>
+          </a:bodyPr>
+          <a:lstStyle/>
+          <a:p>
+            <a:pPr algn="l">
+              <a:defRPr sz="1450" b="1">
+                <a:solidFill>
+                  <a:srgbClr val="15B5A4"/>
+                </a:solidFill>
+                <a:latin typeface="Segoe UI"/>
+              </a:defRPr>
+            </a:pPr>
+            <a:r>
+              <a:t>🌿 ECOSYSTEMS</a:t>
+            </a:r>
+          </a:p>
+        </p:txBody>
+      </p:sp>
+      <p:sp>
+        <p:nvSpPr>
+          <p:cNvPr id="20" name="Rounded Rectangle 19"/>
+          <p:cNvSpPr/>
+          <p:nvPr/>
+        </p:nvSpPr>
+        <p:spPr>
+          <a:xfrm>
+            <a:off x="9089136" y="1975104"/>
+            <a:ext cx="2167128" cy="310896"/>
+          </a:xfrm>
+          <a:prstGeom prst="roundRect">
+            <a:avLst>
+              <a:gd name="adj" fmla="val 35000"/>
+            </a:avLst>
+          </a:prstGeom>
+          <a:solidFill>
+            <a:srgbClr val="162D52"/>
           </a:solidFill>
           <a:ln w="12700">
             <a:solidFill>
@@ -3823,23 +5113,33 @@
           </a:fontRef>
         </p:style>
         <p:txBody>
-          <a:bodyPr rtlCol="0" anchor="ctr"/>
-          <a:lstStyle/>
-          <a:p>
-            <a:pPr algn="ctr"/>
-          </a:p>
-        </p:txBody>
-      </p:sp>
-      <p:sp>
-        <p:nvSpPr>
-          <p:cNvPr id="5" name="TextBox 4"/>
+          <a:bodyPr rtlCol="0" anchor="ctr" wrap="square" tIns="0" bIns="0" lIns="0" rIns="0"/>
+          <a:lstStyle/>
+          <a:p>
+            <a:pPr algn="l">
+              <a:defRPr sz="1150" b="1">
+                <a:solidFill>
+                  <a:srgbClr val="F0C860"/>
+                </a:solidFill>
+                <a:latin typeface="Segoe UI"/>
+              </a:defRPr>
+            </a:pPr>
+            <a:r>
+              <a:t> 100k tCO₂/yr | 4,760 Feddans </a:t>
+            </a:r>
+          </a:p>
+        </p:txBody>
+      </p:sp>
+      <p:sp>
+        <p:nvSpPr>
+          <p:cNvPr id="21" name="TextBox 20"/>
           <p:cNvSpPr txBox="1"/>
           <p:nvPr/>
         </p:nvSpPr>
         <p:spPr>
           <a:xfrm>
-            <a:off x="914400" y="1600200"/>
-            <a:ext cx="10362895" cy="365760"/>
+            <a:off x="9107424" y="2340864"/>
+            <a:ext cx="2130552" cy="1499616"/>
           </a:xfrm>
           <a:prstGeom prst="rect">
             <a:avLst/>
@@ -3853,28 +5153,119 @@
           <a:lstStyle/>
           <a:p>
             <a:pPr algn="l">
-              <a:defRPr sz="1200" b="1">
-                <a:solidFill>
-                  <a:srgbClr val="F0C860"/>
-                </a:solidFill>
-              </a:defRPr>
-            </a:pPr>
-            <a:r>
-              <a:t>⚡ 1. The 4 Closed-Loop WEFE Interventions (100,000 Feddans Pilot)</a:t>
-            </a:r>
-          </a:p>
-        </p:txBody>
-      </p:sp>
-      <p:sp>
-        <p:nvSpPr>
-          <p:cNvPr id="6" name="TextBox 5"/>
+              <a:lnSpc>
+                <a:spcPct val="125000"/>
+              </a:lnSpc>
+              <a:spcAft>
+                <a:spcPts val="500"/>
+              </a:spcAft>
+            </a:pPr>
+            <a:r>
+              <a:rPr sz="1100" b="1">
+                <a:solidFill>
+                  <a:srgbClr val="15B5A4"/>
+                </a:solidFill>
+                <a:latin typeface="Segoe UI"/>
+              </a:rPr>
+              <a:t>• Wetlands: </a:t>
+            </a:r>
+            <a:r>
+              <a:rPr sz="1100">
+                <a:solidFill>
+                  <a:srgbClr val="F8FAFC"/>
+                </a:solidFill>
+                <a:latin typeface="Segoe UI"/>
+              </a:rPr>
+              <a:t>20 constructed wetlands (4,760 feddans) bio-treating 200M m³/yr drainage.</a:t>
+            </a:r>
+          </a:p>
+          <a:p>
+            <a:pPr algn="l">
+              <a:lnSpc>
+                <a:spcPct val="125000"/>
+              </a:lnSpc>
+              <a:spcAft>
+                <a:spcPts val="0"/>
+              </a:spcAft>
+            </a:pPr>
+            <a:r>
+              <a:rPr sz="1100" b="1">
+                <a:solidFill>
+                  <a:srgbClr val="15B5A4"/>
+                </a:solidFill>
+                <a:latin typeface="Segoe UI"/>
+              </a:rPr>
+              <a:t>• Biodiversity: </a:t>
+            </a:r>
+            <a:r>
+              <a:rPr sz="1100">
+                <a:solidFill>
+                  <a:srgbClr val="F8FAFC"/>
+                </a:solidFill>
+                <a:latin typeface="Segoe UI"/>
+              </a:rPr>
+              <a:t>Protects northern Delta coastal lakes and commercial inland fisheries.</a:t>
+            </a:r>
+          </a:p>
+        </p:txBody>
+      </p:sp>
+      <p:sp>
+        <p:nvSpPr>
+          <p:cNvPr id="22" name="Rounded Rectangle 21"/>
+          <p:cNvSpPr/>
+          <p:nvPr/>
+        </p:nvSpPr>
+        <p:spPr>
+          <a:xfrm>
+            <a:off x="731520" y="4069080"/>
+            <a:ext cx="5212080" cy="2423160"/>
+          </a:xfrm>
+          <a:prstGeom prst="roundRect">
+            <a:avLst>
+              <a:gd name="adj" fmla="val 8000"/>
+            </a:avLst>
+          </a:prstGeom>
+          <a:solidFill>
+            <a:srgbClr val="0F2240"/>
+          </a:solidFill>
+          <a:ln w="16510">
+            <a:solidFill>
+              <a:srgbClr val="15B5A4"/>
+            </a:solidFill>
+          </a:ln>
+        </p:spPr>
+        <p:style>
+          <a:lnRef idx="1">
+            <a:schemeClr val="accent1"/>
+          </a:lnRef>
+          <a:fillRef idx="3">
+            <a:schemeClr val="accent1"/>
+          </a:fillRef>
+          <a:effectRef idx="2">
+            <a:schemeClr val="accent1"/>
+          </a:effectRef>
+          <a:fontRef idx="minor">
+            <a:schemeClr val="lt1"/>
+          </a:fontRef>
+        </p:style>
+        <p:txBody>
+          <a:bodyPr rtlCol="0" anchor="ctr"/>
+          <a:lstStyle/>
+          <a:p>
+            <a:pPr algn="ctr"/>
+          </a:p>
+        </p:txBody>
+      </p:sp>
+      <p:sp>
+        <p:nvSpPr>
+          <p:cNvPr id="23" name="TextBox 22"/>
           <p:cNvSpPr txBox="1"/>
           <p:nvPr/>
         </p:nvSpPr>
         <p:spPr>
           <a:xfrm>
-            <a:off x="914400" y="1965960"/>
-            <a:ext cx="10362895" cy="1874520"/>
+            <a:off x="932688" y="4178808"/>
+            <a:ext cx="4809744" cy="347472"/>
           </a:xfrm>
           <a:prstGeom prst="rect">
             <a:avLst/>
@@ -3888,70 +5279,37 @@
           <a:lstStyle/>
           <a:p>
             <a:pPr algn="l">
-              <a:defRPr sz="950">
-                <a:solidFill>
-                  <a:srgbClr val="F8FAFC"/>
-                </a:solidFill>
+              <a:defRPr sz="1450" b="1">
+                <a:solidFill>
+                  <a:srgbClr val="15B5A4"/>
+                </a:solidFill>
+                <a:latin typeface="Segoe UI"/>
               </a:defRPr>
             </a:pPr>
             <a:r>
-              <a:t>💧 WATER: Retrofit 100k feddans with HDPE &amp; geotextile filters (40+ yr life). Motorized gate valves control water table, leveraging Capillary Rise (h=2γcosθ/ρgr) to save 150M m³/yr (25–30% irrigation water).</a:t>
-            </a:r>
-          </a:p>
-          <a:p>
-            <a:pPr algn="l">
-              <a:defRPr sz="950">
-                <a:solidFill>
-                  <a:srgbClr val="F8FAFC"/>
-                </a:solidFill>
-              </a:defRPr>
-            </a:pPr>
-            <a:r>
-              <a:t>☀️ ENERGY: 50 MW distributed solar PV across 25 pump stations producing 90 GWh/yr. Offsets 40% pumping electricity bill; surplus exported via EgyptERA Net Metering to national grid.</a:t>
-            </a:r>
-          </a:p>
-          <a:p>
-            <a:pPr algn="l">
-              <a:defRPr sz="950">
-                <a:solidFill>
-                  <a:srgbClr val="F8FAFC"/>
-                </a:solidFill>
-              </a:defRPr>
-            </a:pPr>
-            <a:r>
-              <a:t>🌾 FOOD: Yield restored by 15–25% (wheat, rice, maize) across 100,000 feddans. Soil EC probe automated flushing (opens valve when EC &gt; 4 dS/m; closes when EC &lt; 2 dS/m).</a:t>
-            </a:r>
-          </a:p>
-          <a:p>
-            <a:pPr algn="l">
-              <a:defRPr sz="950">
-                <a:solidFill>
-                  <a:srgbClr val="F8FAFC"/>
-                </a:solidFill>
-              </a:defRPr>
-            </a:pPr>
-            <a:r>
-              <a:t>🌿 ECOSYSTEMS: 20 constructed wetlands (4,760 feddans) treating 200M m³/yr of drainage water biologically (Phragmites/Typha). Protects Delta lakes fisheries + 100k tCO₂/yr (Verra VM0033).</a:t>
-            </a:r>
-          </a:p>
-        </p:txBody>
-      </p:sp>
-      <p:sp>
-        <p:nvSpPr>
-          <p:cNvPr id="7" name="Rounded Rectangle 6"/>
+              <a:t>📊 Formal WEFE Screening Matrix &amp; Resilience Scoring</a:t>
+            </a:r>
+          </a:p>
+        </p:txBody>
+      </p:sp>
+      <p:sp>
+        <p:nvSpPr>
+          <p:cNvPr id="24" name="Rounded Rectangle 23"/>
           <p:cNvSpPr/>
           <p:nvPr/>
         </p:nvSpPr>
         <p:spPr>
           <a:xfrm>
-            <a:off x="731520" y="4069080"/>
-            <a:ext cx="5212080" cy="2331720"/>
+            <a:off x="914400" y="4507992"/>
+            <a:ext cx="4846320" cy="310896"/>
           </a:xfrm>
           <a:prstGeom prst="roundRect">
-            <a:avLst/>
+            <a:avLst>
+              <a:gd name="adj" fmla="val 35000"/>
+            </a:avLst>
           </a:prstGeom>
           <a:solidFill>
-            <a:srgbClr val="0F2240"/>
+            <a:srgbClr val="162D52"/>
           </a:solidFill>
           <a:ln w="12700">
             <a:solidFill>
@@ -3974,23 +5332,33 @@
           </a:fontRef>
         </p:style>
         <p:txBody>
-          <a:bodyPr rtlCol="0" anchor="ctr"/>
-          <a:lstStyle/>
-          <a:p>
-            <a:pPr algn="ctr"/>
-          </a:p>
-        </p:txBody>
-      </p:sp>
-      <p:sp>
-        <p:nvSpPr>
-          <p:cNvPr id="8" name="TextBox 7"/>
+          <a:bodyPr rtlCol="0" anchor="ctr" wrap="square" tIns="0" bIns="0" lIns="0" rIns="0"/>
+          <a:lstStyle/>
+          <a:p>
+            <a:pPr algn="l">
+              <a:defRPr sz="1150" b="1">
+                <a:solidFill>
+                  <a:srgbClr val="F0C860"/>
+                </a:solidFill>
+                <a:latin typeface="Segoe UI"/>
+              </a:defRPr>
+            </a:pPr>
+            <a:r>
+              <a:t> Composite Score: 92/100 | Resilience Rating: HIGH </a:t>
+            </a:r>
+          </a:p>
+        </p:txBody>
+      </p:sp>
+      <p:sp>
+        <p:nvSpPr>
+          <p:cNvPr id="25" name="TextBox 24"/>
           <p:cNvSpPr txBox="1"/>
           <p:nvPr/>
         </p:nvSpPr>
         <p:spPr>
           <a:xfrm>
-            <a:off x="914400" y="4206240"/>
-            <a:ext cx="4846320" cy="365760"/>
+            <a:off x="932688" y="4873752"/>
+            <a:ext cx="4809744" cy="1527048"/>
           </a:xfrm>
           <a:prstGeom prst="rect">
             <a:avLst/>
@@ -4004,133 +5372,112 @@
           <a:lstStyle/>
           <a:p>
             <a:pPr algn="l">
-              <a:defRPr sz="1200" b="1">
+              <a:lnSpc>
+                <a:spcPct val="125000"/>
+              </a:lnSpc>
+              <a:spcAft>
+                <a:spcPts val="600"/>
+              </a:spcAft>
+            </a:pPr>
+            <a:r>
+              <a:rPr sz="1150" b="1">
                 <a:solidFill>
                   <a:srgbClr val="15B5A4"/>
                 </a:solidFill>
-              </a:defRPr>
-            </a:pPr>
-            <a:r>
-              <a:t>📊 2. Formal WEFE Screening Matrix &amp; Resilience Scoring</a:t>
-            </a:r>
-          </a:p>
-        </p:txBody>
-      </p:sp>
-      <p:sp>
-        <p:nvSpPr>
-          <p:cNvPr id="9" name="TextBox 8"/>
-          <p:cNvSpPr txBox="1"/>
-          <p:nvPr/>
-        </p:nvSpPr>
-        <p:spPr>
-          <a:xfrm>
-            <a:off x="914400" y="4572000"/>
-            <a:ext cx="4846320" cy="1737360"/>
-          </a:xfrm>
-          <a:prstGeom prst="rect">
-            <a:avLst/>
-          </a:prstGeom>
-          <a:noFill/>
-        </p:spPr>
-        <p:txBody>
-          <a:bodyPr wrap="square" tIns="0" bIns="0" lIns="0" rIns="0">
-            <a:spAutoFit/>
-          </a:bodyPr>
-          <a:lstStyle/>
+                <a:latin typeface="Segoe UI"/>
+              </a:rPr>
+              <a:t>• Dimension Scores: </a:t>
+            </a:r>
+            <a:r>
+              <a:rPr sz="1150">
+                <a:solidFill>
+                  <a:srgbClr val="F8FAFC"/>
+                </a:solidFill>
+                <a:latin typeface="Segoe UI"/>
+              </a:rPr>
+              <a:t>Water: 10/10 | Energy: 8/10 | Food: 10/10 | Ecosystems: 8/10 | Enablers: 9/10.</a:t>
+            </a:r>
+          </a:p>
           <a:p>
             <a:pPr algn="l">
-              <a:defRPr sz="850">
+              <a:lnSpc>
+                <a:spcPct val="125000"/>
+              </a:lnSpc>
+              <a:spcAft>
+                <a:spcPts val="600"/>
+              </a:spcAft>
+            </a:pPr>
+            <a:r>
+              <a:rPr sz="1150" b="1">
+                <a:solidFill>
+                  <a:srgbClr val="15B5A4"/>
+                </a:solidFill>
+                <a:latin typeface="Segoe UI"/>
+              </a:rPr>
+              <a:t>• Digital Enablers: </a:t>
+            </a:r>
+            <a:r>
+              <a:rPr sz="1150">
                 <a:solidFill>
                   <a:srgbClr val="F8FAFC"/>
                 </a:solidFill>
-              </a:defRPr>
-            </a:pPr>
-            <a:r>
-              <a:t>• Water Dimension (Score: 10/10): 150M m³/yr saved; water table stabilized at 0.8–1.2m.</a:t>
+                <a:latin typeface="Segoe UI"/>
+              </a:rPr>
+              <a:t>5,000 IoT nodes + hydraulic Digital Twin enabling real-time remote telemetry.</a:t>
             </a:r>
           </a:p>
           <a:p>
             <a:pPr algn="l">
-              <a:defRPr sz="850">
+              <a:lnSpc>
+                <a:spcPct val="125000"/>
+              </a:lnSpc>
+              <a:spcAft>
+                <a:spcPts val="0"/>
+              </a:spcAft>
+            </a:pPr>
+            <a:r>
+              <a:rPr sz="1150" b="1">
+                <a:solidFill>
+                  <a:srgbClr val="15B5A4"/>
+                </a:solidFill>
+                <a:latin typeface="Segoe UI"/>
+              </a:rPr>
+              <a:t>• Shock Absorption: </a:t>
+            </a:r>
+            <a:r>
+              <a:rPr sz="1150">
                 <a:solidFill>
                   <a:srgbClr val="F8FAFC"/>
                 </a:solidFill>
-              </a:defRPr>
-            </a:pPr>
-            <a:r>
-              <a:t>• Energy Dimension (Score: 8/10): 50 MW solar; 90 GWh/yr clean power; 40% OPEX cut.</a:t>
-            </a:r>
-          </a:p>
-          <a:p>
-            <a:pPr algn="l">
-              <a:defRPr sz="850">
-                <a:solidFill>
-                  <a:srgbClr val="F8FAFC"/>
-                </a:solidFill>
-              </a:defRPr>
-            </a:pPr>
-            <a:r>
-              <a:t>• Food Dimension (Score: 10/10): 15–25% yield boost; import substitution; 200k farmers.</a:t>
-            </a:r>
-          </a:p>
-          <a:p>
-            <a:pPr algn="l">
-              <a:defRPr sz="850">
-                <a:solidFill>
-                  <a:srgbClr val="F8FAFC"/>
-                </a:solidFill>
-              </a:defRPr>
-            </a:pPr>
-            <a:r>
-              <a:t>• Ecosystem Dimension (Score: 8/10): 4,760 feddans wetlands; blue carbon; lake biodiversity.</a:t>
-            </a:r>
-          </a:p>
-          <a:p>
-            <a:pPr algn="l">
-              <a:defRPr sz="850">
-                <a:solidFill>
-                  <a:srgbClr val="F8FAFC"/>
-                </a:solidFill>
-              </a:defRPr>
-            </a:pPr>
-            <a:r>
-              <a:t>• Enabler Dimension (Score: 9/10): 5,000 IoT nodes (ESP32); AI digital twin; tamper alert.</a:t>
-            </a:r>
-          </a:p>
-          <a:p>
-            <a:pPr algn="l">
-              <a:defRPr sz="850">
-                <a:solidFill>
-                  <a:srgbClr val="F0C860"/>
-                </a:solidFill>
-              </a:defRPr>
-            </a:pPr>
-            <a:r>
-              <a:t>• COMPOSITE WEFE SCORE: 92/100: RESILIENCE SCORECARD: HIGH across all 5 dimensions.</a:t>
-            </a:r>
-          </a:p>
-        </p:txBody>
-      </p:sp>
-      <p:sp>
-        <p:nvSpPr>
-          <p:cNvPr id="10" name="Rounded Rectangle 9"/>
+                <a:latin typeface="Segoe UI"/>
+              </a:rPr>
+              <a:t>Robust buffer against prolonged droughts and rapid soil salinization waves.</a:t>
+            </a:r>
+          </a:p>
+        </p:txBody>
+      </p:sp>
+      <p:sp>
+        <p:nvSpPr>
+          <p:cNvPr id="26" name="Rounded Rectangle 25"/>
           <p:cNvSpPr/>
           <p:nvPr/>
         </p:nvSpPr>
         <p:spPr>
           <a:xfrm>
             <a:off x="6217920" y="4069080"/>
-            <a:ext cx="5242255" cy="2331720"/>
+            <a:ext cx="5242255" cy="2423160"/>
           </a:xfrm>
           <a:prstGeom prst="roundRect">
-            <a:avLst/>
+            <a:avLst>
+              <a:gd name="adj" fmla="val 8000"/>
+            </a:avLst>
           </a:prstGeom>
           <a:solidFill>
             <a:srgbClr val="0F2240"/>
           </a:solidFill>
-          <a:ln w="12700">
+          <a:ln w="16510">
             <a:solidFill>
-              <a:srgbClr val="15B5A4"/>
+              <a:srgbClr val="10B981"/>
             </a:solidFill>
           </a:ln>
         </p:spPr>
@@ -4158,14 +5505,14 @@
       </p:sp>
       <p:sp>
         <p:nvSpPr>
-          <p:cNvPr id="11" name="TextBox 10"/>
+          <p:cNvPr id="27" name="TextBox 26"/>
           <p:cNvSpPr txBox="1"/>
           <p:nvPr/>
         </p:nvSpPr>
         <p:spPr>
           <a:xfrm>
-            <a:off x="6400800" y="4206240"/>
-            <a:ext cx="4876495" cy="365760"/>
+            <a:off x="6419088" y="4178808"/>
+            <a:ext cx="4839919" cy="347472"/>
           </a:xfrm>
           <a:prstGeom prst="rect">
             <a:avLst/>
@@ -4179,28 +5526,86 @@
           <a:lstStyle/>
           <a:p>
             <a:pPr algn="l">
-              <a:defRPr sz="1200" b="1">
+              <a:defRPr sz="1450" b="1">
                 <a:solidFill>
                   <a:srgbClr val="10B981"/>
                 </a:solidFill>
+                <a:latin typeface="Segoe UI"/>
               </a:defRPr>
             </a:pPr>
             <a:r>
-              <a:t>💎 3. How WEFE Integration Directly Drives Bankability</a:t>
-            </a:r>
-          </a:p>
-        </p:txBody>
-      </p:sp>
-      <p:sp>
-        <p:nvSpPr>
-          <p:cNvPr id="12" name="TextBox 11"/>
+              <a:t>💎 How WEFE Integration Drives Project Bankability</a:t>
+            </a:r>
+          </a:p>
+        </p:txBody>
+      </p:sp>
+      <p:sp>
+        <p:nvSpPr>
+          <p:cNvPr id="28" name="Rounded Rectangle 27"/>
+          <p:cNvSpPr/>
+          <p:nvPr/>
+        </p:nvSpPr>
+        <p:spPr>
+          <a:xfrm>
+            <a:off x="6400800" y="4507992"/>
+            <a:ext cx="4876495" cy="310896"/>
+          </a:xfrm>
+          <a:prstGeom prst="roundRect">
+            <a:avLst>
+              <a:gd name="adj" fmla="val 35000"/>
+            </a:avLst>
+          </a:prstGeom>
+          <a:solidFill>
+            <a:srgbClr val="162D52"/>
+          </a:solidFill>
+          <a:ln w="12700">
+            <a:solidFill>
+              <a:srgbClr val="10B981"/>
+            </a:solidFill>
+          </a:ln>
+        </p:spPr>
+        <p:style>
+          <a:lnRef idx="1">
+            <a:schemeClr val="accent1"/>
+          </a:lnRef>
+          <a:fillRef idx="3">
+            <a:schemeClr val="accent1"/>
+          </a:fillRef>
+          <a:effectRef idx="2">
+            <a:schemeClr val="accent1"/>
+          </a:effectRef>
+          <a:fontRef idx="minor">
+            <a:schemeClr val="lt1"/>
+          </a:fontRef>
+        </p:style>
+        <p:txBody>
+          <a:bodyPr rtlCol="0" anchor="ctr" wrap="square" tIns="0" bIns="0" lIns="0" rIns="0"/>
+          <a:lstStyle/>
+          <a:p>
+            <a:pPr algn="l">
+              <a:defRPr sz="1150" b="1">
+                <a:solidFill>
+                  <a:srgbClr val="F0C860"/>
+                </a:solidFill>
+                <a:latin typeface="Segoe UI"/>
+              </a:defRPr>
+            </a:pPr>
+            <a:r>
+              <a:t> DSCR = 1.35x | Smart Valve Payback = 0.48 Years </a:t>
+            </a:r>
+          </a:p>
+        </p:txBody>
+      </p:sp>
+      <p:sp>
+        <p:nvSpPr>
+          <p:cNvPr id="29" name="TextBox 28"/>
           <p:cNvSpPr txBox="1"/>
           <p:nvPr/>
         </p:nvSpPr>
         <p:spPr>
           <a:xfrm>
-            <a:off x="6400800" y="4572000"/>
-            <a:ext cx="4876495" cy="1737360"/>
+            <a:off x="6419088" y="4873752"/>
+            <a:ext cx="4839919" cy="1527048"/>
           </a:xfrm>
           <a:prstGeom prst="rect">
             <a:avLst/>
@@ -4214,50 +5619,114 @@
           <a:lstStyle/>
           <a:p>
             <a:pPr algn="l">
-              <a:defRPr sz="850">
+              <a:lnSpc>
+                <a:spcPct val="125000"/>
+              </a:lnSpc>
+              <a:spcAft>
+                <a:spcPts val="500"/>
+              </a:spcAft>
+            </a:pPr>
+            <a:r>
+              <a:rPr sz="1150" b="1">
+                <a:solidFill>
+                  <a:srgbClr val="F0C860"/>
+                </a:solidFill>
+                <a:latin typeface="Segoe UI"/>
+              </a:rPr>
+              <a:t>• OPEX Self-Sufficiency: </a:t>
+            </a:r>
+            <a:r>
+              <a:rPr sz="1150">
                 <a:solidFill>
                   <a:srgbClr val="F8FAFC"/>
                 </a:solidFill>
-              </a:defRPr>
-            </a:pPr>
-            <a:r>
-              <a:t>• OPEX Self-Sufficiency: Solar generation monetized via Net Metering pays pump electricity, slashing default risk and protecting DSCR (1.35x).</a:t>
+                <a:latin typeface="Segoe UI"/>
+              </a:rPr>
+              <a:t>Solar net-metering monetized electricity pays pump operating costs, protecting DSCR (1.35x).</a:t>
             </a:r>
           </a:p>
           <a:p>
             <a:pPr algn="l">
-              <a:defRPr sz="850">
+              <a:lnSpc>
+                <a:spcPct val="125000"/>
+              </a:lnSpc>
+              <a:spcAft>
+                <a:spcPts val="500"/>
+              </a:spcAft>
+            </a:pPr>
+            <a:r>
+              <a:rPr sz="1150" b="1">
+                <a:solidFill>
+                  <a:srgbClr val="10B981"/>
+                </a:solidFill>
+                <a:latin typeface="Segoe UI"/>
+              </a:rPr>
+              <a:t>• Avoided Cost Valuation: </a:t>
+            </a:r>
+            <a:r>
+              <a:rPr sz="1150">
                 <a:solidFill>
                   <a:srgbClr val="F8FAFC"/>
                 </a:solidFill>
-              </a:defRPr>
-            </a:pPr>
-            <a:r>
-              <a:t>• Quantified Avoided-Cost Value: Saving 150M m³/yr is valued at $52.5M/yr (at $0.35/m³ alternative supply), yielding an investment payback of only 0.48 years for smart irrigation.</a:t>
+                <a:latin typeface="Segoe UI"/>
+              </a:rPr>
+              <a:t>150M m³/yr saved equals $52.5M/yr, achieving an investment payback of 0.48 yr on smart gates.</a:t>
             </a:r>
           </a:p>
           <a:p>
             <a:pPr algn="l">
-              <a:defRPr sz="850">
+              <a:lnSpc>
+                <a:spcPct val="125000"/>
+              </a:lnSpc>
+              <a:spcAft>
+                <a:spcPts val="500"/>
+              </a:spcAft>
+            </a:pPr>
+            <a:r>
+              <a:rPr sz="1150" b="1">
+                <a:solidFill>
+                  <a:srgbClr val="10B981"/>
+                </a:solidFill>
+                <a:latin typeface="Segoe UI"/>
+              </a:rPr>
+              <a:t>• Diversified Revenues: </a:t>
+            </a:r>
+            <a:r>
+              <a:rPr sz="1150">
                 <a:solidFill>
                   <a:srgbClr val="F8FAFC"/>
                 </a:solidFill>
-              </a:defRPr>
-            </a:pPr>
-            <a:r>
-              <a:t>• Diversified Revenue Streams: Energy savings ($8M/yr) + Grid export ($3M/yr) + Avoided water costs ($5M/yr) + Carbon offsets ($0.5M/yr) + Enhanced farmer tariffs.</a:t>
+                <a:latin typeface="Segoe UI"/>
+              </a:rPr>
+              <a:t>Energy savings ($8M) + Grid export ($3M) + Avoided water ($5M) + Carbon ($0.5M).</a:t>
             </a:r>
           </a:p>
           <a:p>
             <a:pPr algn="l">
-              <a:defRPr sz="850">
+              <a:lnSpc>
+                <a:spcPct val="125000"/>
+              </a:lnSpc>
+              <a:spcAft>
+                <a:spcPts val="0"/>
+              </a:spcAft>
+            </a:pPr>
+            <a:r>
+              <a:rPr sz="1150" b="1">
+                <a:solidFill>
+                  <a:srgbClr val="10B981"/>
+                </a:solidFill>
+                <a:latin typeface="Segoe UI"/>
+              </a:rPr>
+              <a:t>• In-Situ Development: </a:t>
+            </a:r>
+            <a:r>
+              <a:rPr sz="1150">
                 <a:solidFill>
                   <a:srgbClr val="F8FAFC"/>
                 </a:solidFill>
-              </a:defRPr>
-            </a:pPr>
-            <a:r>
-              <a:t>• Zero Downstream Displacement: Unlike mega-diversion plants (Bahr El-Baqar), Eco-Drain operates in-situ, eliminating community conflict and environmental safeguard rejection.</a:t>
+                <a:latin typeface="Segoe UI"/>
+              </a:rPr>
+              <a:t>Zero displacement or community conflict, removing ESG social safeguard risks completely.</a:t>
             </a:r>
           </a:p>
         </p:txBody>
@@ -4325,14 +5794,116 @@
       </p:sp>
       <p:sp>
         <p:nvSpPr>
-          <p:cNvPr id="3" name="TextBox 2"/>
+          <p:cNvPr id="3" name="Rounded Rectangle 2"/>
+          <p:cNvSpPr/>
+          <p:nvPr/>
+        </p:nvSpPr>
+        <p:spPr>
+          <a:xfrm>
+            <a:off x="731520" y="146304"/>
+            <a:ext cx="10728655" cy="36576"/>
+          </a:xfrm>
+          <a:prstGeom prst="roundRect">
+            <a:avLst>
+              <a:gd name="adj" fmla="val 50000"/>
+            </a:avLst>
+          </a:prstGeom>
+          <a:solidFill>
+            <a:srgbClr val="15B5A4"/>
+          </a:solidFill>
+          <a:ln>
+            <a:noFill/>
+          </a:ln>
+        </p:spPr>
+        <p:style>
+          <a:lnRef idx="1">
+            <a:schemeClr val="accent1"/>
+          </a:lnRef>
+          <a:fillRef idx="3">
+            <a:schemeClr val="accent1"/>
+          </a:fillRef>
+          <a:effectRef idx="2">
+            <a:schemeClr val="accent1"/>
+          </a:effectRef>
+          <a:fontRef idx="minor">
+            <a:schemeClr val="lt1"/>
+          </a:fontRef>
+        </p:style>
+        <p:txBody>
+          <a:bodyPr rtlCol="0" anchor="ctr"/>
+          <a:lstStyle/>
+          <a:p>
+            <a:pPr algn="ctr"/>
+          </a:p>
+        </p:txBody>
+      </p:sp>
+      <p:sp>
+        <p:nvSpPr>
+          <p:cNvPr id="4" name="Rounded Rectangle 3"/>
+          <p:cNvSpPr/>
+          <p:nvPr/>
+        </p:nvSpPr>
+        <p:spPr>
+          <a:xfrm>
+            <a:off x="731520" y="292608"/>
+            <a:ext cx="4846320" cy="292608"/>
+          </a:xfrm>
+          <a:prstGeom prst="roundRect">
+            <a:avLst>
+              <a:gd name="adj" fmla="val 50000"/>
+            </a:avLst>
+          </a:prstGeom>
+          <a:solidFill>
+            <a:srgbClr val="162D52"/>
+          </a:solidFill>
+          <a:ln w="15240">
+            <a:solidFill>
+              <a:srgbClr val="15B5A4"/>
+            </a:solidFill>
+          </a:ln>
+        </p:spPr>
+        <p:style>
+          <a:lnRef idx="1">
+            <a:schemeClr val="accent1"/>
+          </a:lnRef>
+          <a:fillRef idx="3">
+            <a:schemeClr val="accent1"/>
+          </a:fillRef>
+          <a:effectRef idx="2">
+            <a:schemeClr val="accent1"/>
+          </a:effectRef>
+          <a:fontRef idx="minor">
+            <a:schemeClr val="lt1"/>
+          </a:fontRef>
+        </p:style>
+        <p:txBody>
+          <a:bodyPr rtlCol="0" anchor="ctr" wrap="none" tIns="0" bIns="0" lIns="0" rIns="0"/>
+          <a:lstStyle/>
+          <a:p>
+            <a:pPr algn="ctr">
+              <a:defRPr sz="1050" b="1">
+                <a:solidFill>
+                  <a:srgbClr val="15B5A4"/>
+                </a:solidFill>
+                <a:latin typeface="Segoe UI"/>
+              </a:defRPr>
+            </a:pPr>
+            <a:r>
+              <a:t>SLIDE 3 OF 3 | 5-MIN EXECUTIVE PITCH | CLIMATE RESILIENT WEFE</a:t>
+            </a:r>
+          </a:p>
+        </p:txBody>
+      </p:sp>
+      <p:sp>
+        <p:nvSpPr>
+          <p:cNvPr id="5" name="TextBox 4"/>
           <p:cNvSpPr txBox="1"/>
           <p:nvPr/>
         </p:nvSpPr>
         <p:spPr>
           <a:xfrm>
-            <a:off x="731520" y="365760"/>
-            <a:ext cx="10728655" cy="1051560"/>
+            <a:off x="731520" y="658368"/>
+            <a:ext cx="10728655" cy="804672"/>
           </a:xfrm>
           <a:prstGeom prst="rect">
             <a:avLst/>
@@ -4346,58 +5917,689 @@
           <a:lstStyle/>
           <a:p>
             <a:pPr algn="l">
-              <a:defRPr sz="950" b="1">
-                <a:solidFill>
-                  <a:srgbClr val="15B5A4"/>
-                </a:solidFill>
+              <a:lnSpc>
+                <a:spcPct val="115000"/>
+              </a:lnSpc>
+              <a:defRPr sz="2200" b="1">
+                <a:solidFill>
+                  <a:srgbClr val="F8FAFC"/>
+                </a:solidFill>
+                <a:latin typeface="Segoe UI"/>
               </a:defRPr>
             </a:pPr>
             <a:r>
-              <a:t>SLIDE 3 OF 3 | 5-MIN EXECUTIVE PITCH | WEFE NEXUS PROFESSIONAL SERIES</a:t>
+              <a:t>Blended Finance Capital Stack, Readiness, KPIs &amp; Scaling Strategy</a:t>
             </a:r>
           </a:p>
           <a:p>
             <a:pPr algn="l">
-              <a:defRPr sz="1900" b="1">
-                <a:solidFill>
-                  <a:srgbClr val="F8FAFC"/>
-                </a:solidFill>
+              <a:lnSpc>
+                <a:spcPct val="120000"/>
+              </a:lnSpc>
+              <a:defRPr sz="1200">
+                <a:solidFill>
+                  <a:srgbClr val="F0C860"/>
+                </a:solidFill>
+                <a:latin typeface="Segoe UI"/>
               </a:defRPr>
             </a:pPr>
             <a:r>
-              <a:t>Blended Finance Capital Stack, Readiness, KPIs &amp; Scaling Strategy</a:t>
-            </a:r>
-          </a:p>
-          <a:p>
-            <a:pPr algn="l">
-              <a:defRPr sz="1100">
-                <a:solidFill>
-                  <a:srgbClr val="F0C860"/>
-                </a:solidFill>
-              </a:defRPr>
-            </a:pPr>
-            <a:r>
-              <a:t>4. Budget &amp; Financiers | 5. Readiness Status | 6. Expected Results &amp; Scaling Pathway</a:t>
-            </a:r>
-          </a:p>
-        </p:txBody>
-      </p:sp>
-      <p:sp>
-        <p:nvSpPr>
-          <p:cNvPr id="4" name="Rounded Rectangle 3"/>
+              <a:t>4. Budget &amp; Financiers | 5. Readiness &amp; 10-Feddan Pilot | 6. Expected Results &amp; Regional Scaling Pathway</a:t>
+            </a:r>
+          </a:p>
+        </p:txBody>
+      </p:sp>
+      <p:sp>
+        <p:nvSpPr>
+          <p:cNvPr id="6" name="Rounded Rectangle 5"/>
           <p:cNvSpPr/>
           <p:nvPr/>
         </p:nvSpPr>
         <p:spPr>
           <a:xfrm>
-            <a:off x="731520" y="1463040"/>
-            <a:ext cx="5212080" cy="2560320"/>
+            <a:off x="731520" y="1536192"/>
+            <a:ext cx="5212080" cy="2423160"/>
           </a:xfrm>
           <a:prstGeom prst="roundRect">
-            <a:avLst/>
+            <a:avLst>
+              <a:gd name="adj" fmla="val 8000"/>
+            </a:avLst>
           </a:prstGeom>
           <a:solidFill>
             <a:srgbClr val="0F2240"/>
+          </a:solidFill>
+          <a:ln w="16510">
+            <a:solidFill>
+              <a:srgbClr val="D4A843"/>
+            </a:solidFill>
+          </a:ln>
+        </p:spPr>
+        <p:style>
+          <a:lnRef idx="1">
+            <a:schemeClr val="accent1"/>
+          </a:lnRef>
+          <a:fillRef idx="3">
+            <a:schemeClr val="accent1"/>
+          </a:fillRef>
+          <a:effectRef idx="2">
+            <a:schemeClr val="accent1"/>
+          </a:effectRef>
+          <a:fontRef idx="minor">
+            <a:schemeClr val="lt1"/>
+          </a:fontRef>
+        </p:style>
+        <p:txBody>
+          <a:bodyPr rtlCol="0" anchor="ctr"/>
+          <a:lstStyle/>
+          <a:p>
+            <a:pPr algn="ctr"/>
+          </a:p>
+        </p:txBody>
+      </p:sp>
+      <p:sp>
+        <p:nvSpPr>
+          <p:cNvPr id="7" name="TextBox 6"/>
+          <p:cNvSpPr txBox="1"/>
+          <p:nvPr/>
+        </p:nvSpPr>
+        <p:spPr>
+          <a:xfrm>
+            <a:off x="932688" y="1645920"/>
+            <a:ext cx="4809744" cy="347472"/>
+          </a:xfrm>
+          <a:prstGeom prst="rect">
+            <a:avLst/>
+          </a:prstGeom>
+          <a:noFill/>
+        </p:spPr>
+        <p:txBody>
+          <a:bodyPr wrap="square" tIns="0" bIns="0" lIns="0" rIns="0">
+            <a:spAutoFit/>
+          </a:bodyPr>
+          <a:lstStyle/>
+          <a:p>
+            <a:pPr algn="l">
+              <a:defRPr sz="1450" b="1">
+                <a:solidFill>
+                  <a:srgbClr val="F0C860"/>
+                </a:solidFill>
+                <a:latin typeface="Segoe UI"/>
+              </a:defRPr>
+            </a:pPr>
+            <a:r>
+              <a:t>💰 1. Total Investment ($420M) &amp; Capital Stack</a:t>
+            </a:r>
+          </a:p>
+        </p:txBody>
+      </p:sp>
+      <p:sp>
+        <p:nvSpPr>
+          <p:cNvPr id="8" name="Rounded Rectangle 7"/>
+          <p:cNvSpPr/>
+          <p:nvPr/>
+        </p:nvSpPr>
+        <p:spPr>
+          <a:xfrm>
+            <a:off x="914400" y="1975104"/>
+            <a:ext cx="4846320" cy="310896"/>
+          </a:xfrm>
+          <a:prstGeom prst="roundRect">
+            <a:avLst>
+              <a:gd name="adj" fmla="val 35000"/>
+            </a:avLst>
+          </a:prstGeom>
+          <a:solidFill>
+            <a:srgbClr val="162D52"/>
+          </a:solidFill>
+          <a:ln w="12700">
+            <a:solidFill>
+              <a:srgbClr val="D4A843"/>
+            </a:solidFill>
+          </a:ln>
+        </p:spPr>
+        <p:style>
+          <a:lnRef idx="1">
+            <a:schemeClr val="accent1"/>
+          </a:lnRef>
+          <a:fillRef idx="3">
+            <a:schemeClr val="accent1"/>
+          </a:fillRef>
+          <a:effectRef idx="2">
+            <a:schemeClr val="accent1"/>
+          </a:effectRef>
+          <a:fontRef idx="minor">
+            <a:schemeClr val="lt1"/>
+          </a:fontRef>
+        </p:style>
+        <p:txBody>
+          <a:bodyPr rtlCol="0" anchor="ctr" wrap="square" tIns="0" bIns="0" lIns="0" rIns="0"/>
+          <a:lstStyle/>
+          <a:p>
+            <a:pPr algn="l">
+              <a:defRPr sz="1150" b="1">
+                <a:solidFill>
+                  <a:srgbClr val="F0C860"/>
+                </a:solidFill>
+                <a:latin typeface="Segoe UI"/>
+              </a:defRPr>
+            </a:pPr>
+            <a:r>
+              <a:t> CAPEX: $420M ($4,200/feddan) | EIRR: 21.4% | Payback: 8 Yrs </a:t>
+            </a:r>
+          </a:p>
+        </p:txBody>
+      </p:sp>
+      <p:sp>
+        <p:nvSpPr>
+          <p:cNvPr id="9" name="TextBox 8"/>
+          <p:cNvSpPr txBox="1"/>
+          <p:nvPr/>
+        </p:nvSpPr>
+        <p:spPr>
+          <a:xfrm>
+            <a:off x="932688" y="2340864"/>
+            <a:ext cx="4809744" cy="1527048"/>
+          </a:xfrm>
+          <a:prstGeom prst="rect">
+            <a:avLst/>
+          </a:prstGeom>
+          <a:noFill/>
+        </p:spPr>
+        <p:txBody>
+          <a:bodyPr wrap="square" tIns="0" bIns="0" lIns="0" rIns="0">
+            <a:spAutoFit/>
+          </a:bodyPr>
+          <a:lstStyle/>
+          <a:p>
+            <a:pPr algn="l">
+              <a:lnSpc>
+                <a:spcPct val="125000"/>
+              </a:lnSpc>
+              <a:spcAft>
+                <a:spcPts val="500"/>
+              </a:spcAft>
+            </a:pPr>
+            <a:r>
+              <a:rPr sz="1150" b="1">
+                <a:solidFill>
+                  <a:srgbClr val="F0C860"/>
+                </a:solidFill>
+                <a:latin typeface="Segoe UI"/>
+              </a:rPr>
+              <a:t>• 15% Grants / TA ($63M): </a:t>
+            </a:r>
+            <a:r>
+              <a:rPr sz="1150">
+                <a:solidFill>
+                  <a:srgbClr val="F8FAFC"/>
+                </a:solidFill>
+                <a:latin typeface="Segoe UI"/>
+              </a:rPr>
+              <a:t>GCF Readiness, AfDB, EU for 10-feddan pilot, Digital Twin &amp; capacity.</a:t>
+            </a:r>
+          </a:p>
+          <a:p>
+            <a:pPr algn="l">
+              <a:lnSpc>
+                <a:spcPct val="125000"/>
+              </a:lnSpc>
+              <a:spcAft>
+                <a:spcPts val="500"/>
+              </a:spcAft>
+            </a:pPr>
+            <a:r>
+              <a:rPr sz="1150" b="1">
+                <a:solidFill>
+                  <a:srgbClr val="F8FAFC"/>
+                </a:solidFill>
+                <a:latin typeface="Segoe UI"/>
+              </a:rPr>
+              <a:t>• 20% Government Equity ($84M): </a:t>
+            </a:r>
+            <a:r>
+              <a:rPr sz="1150">
+                <a:solidFill>
+                  <a:srgbClr val="F8FAFC"/>
+                </a:solidFill>
+                <a:latin typeface="Segoe UI"/>
+              </a:rPr>
+              <a:t>In-kind land, existing pump stations, EPADP engineering workforce.</a:t>
+            </a:r>
+          </a:p>
+          <a:p>
+            <a:pPr algn="l">
+              <a:lnSpc>
+                <a:spcPct val="125000"/>
+              </a:lnSpc>
+              <a:spcAft>
+                <a:spcPts val="500"/>
+              </a:spcAft>
+            </a:pPr>
+            <a:r>
+              <a:rPr sz="1150" b="1">
+                <a:solidFill>
+                  <a:srgbClr val="F8FAFC"/>
+                </a:solidFill>
+                <a:latin typeface="Segoe UI"/>
+              </a:rPr>
+              <a:t>• 40% Concessional Debt ($168M): </a:t>
+            </a:r>
+            <a:r>
+              <a:rPr sz="1150">
+                <a:solidFill>
+                  <a:srgbClr val="F8FAFC"/>
+                </a:solidFill>
+                <a:latin typeface="Segoe UI"/>
+              </a:rPr>
+              <a:t>World Bank (NDP V), AfDB (20-25 yr tenor, long grace period).</a:t>
+            </a:r>
+          </a:p>
+          <a:p>
+            <a:pPr algn="l">
+              <a:lnSpc>
+                <a:spcPct val="125000"/>
+              </a:lnSpc>
+              <a:spcAft>
+                <a:spcPts val="0"/>
+              </a:spcAft>
+            </a:pPr>
+            <a:r>
+              <a:rPr sz="1150" b="1">
+                <a:solidFill>
+                  <a:srgbClr val="F0C860"/>
+                </a:solidFill>
+                <a:latin typeface="Segoe UI"/>
+              </a:rPr>
+              <a:t>• 25% Commercial Debt / PPP ($105M): </a:t>
+            </a:r>
+            <a:r>
+              <a:rPr sz="1150">
+                <a:solidFill>
+                  <a:srgbClr val="F8FAFC"/>
+                </a:solidFill>
+                <a:latin typeface="Segoe UI"/>
+              </a:rPr>
+              <a:t>Private solar developers secured by PPA | DSCR = 1.35x.</a:t>
+            </a:r>
+          </a:p>
+        </p:txBody>
+      </p:sp>
+      <p:sp>
+        <p:nvSpPr>
+          <p:cNvPr id="10" name="Rounded Rectangle 9"/>
+          <p:cNvSpPr/>
+          <p:nvPr/>
+        </p:nvSpPr>
+        <p:spPr>
+          <a:xfrm>
+            <a:off x="6217920" y="1536192"/>
+            <a:ext cx="5242255" cy="2423160"/>
+          </a:xfrm>
+          <a:prstGeom prst="roundRect">
+            <a:avLst>
+              <a:gd name="adj" fmla="val 8000"/>
+            </a:avLst>
+          </a:prstGeom>
+          <a:solidFill>
+            <a:srgbClr val="0F2240"/>
+          </a:solidFill>
+          <a:ln w="16510">
+            <a:solidFill>
+              <a:srgbClr val="10B981"/>
+            </a:solidFill>
+          </a:ln>
+        </p:spPr>
+        <p:style>
+          <a:lnRef idx="1">
+            <a:schemeClr val="accent1"/>
+          </a:lnRef>
+          <a:fillRef idx="3">
+            <a:schemeClr val="accent1"/>
+          </a:fillRef>
+          <a:effectRef idx="2">
+            <a:schemeClr val="accent1"/>
+          </a:effectRef>
+          <a:fontRef idx="minor">
+            <a:schemeClr val="lt1"/>
+          </a:fontRef>
+        </p:style>
+        <p:txBody>
+          <a:bodyPr rtlCol="0" anchor="ctr"/>
+          <a:lstStyle/>
+          <a:p>
+            <a:pPr algn="ctr"/>
+          </a:p>
+        </p:txBody>
+      </p:sp>
+      <p:sp>
+        <p:nvSpPr>
+          <p:cNvPr id="11" name="TextBox 10"/>
+          <p:cNvSpPr txBox="1"/>
+          <p:nvPr/>
+        </p:nvSpPr>
+        <p:spPr>
+          <a:xfrm>
+            <a:off x="6419088" y="1645920"/>
+            <a:ext cx="4839919" cy="347472"/>
+          </a:xfrm>
+          <a:prstGeom prst="rect">
+            <a:avLst/>
+          </a:prstGeom>
+          <a:noFill/>
+        </p:spPr>
+        <p:txBody>
+          <a:bodyPr wrap="square" tIns="0" bIns="0" lIns="0" rIns="0">
+            <a:spAutoFit/>
+          </a:bodyPr>
+          <a:lstStyle/>
+          <a:p>
+            <a:pPr algn="l">
+              <a:defRPr sz="1450" b="1">
+                <a:solidFill>
+                  <a:srgbClr val="10B981"/>
+                </a:solidFill>
+                <a:latin typeface="Segoe UI"/>
+              </a:defRPr>
+            </a:pPr>
+            <a:r>
+              <a:t>🚀 2. Implementation Readiness &amp; 10-Feddan Pilot</a:t>
+            </a:r>
+          </a:p>
+        </p:txBody>
+      </p:sp>
+      <p:sp>
+        <p:nvSpPr>
+          <p:cNvPr id="12" name="Rounded Rectangle 11"/>
+          <p:cNvSpPr/>
+          <p:nvPr/>
+        </p:nvSpPr>
+        <p:spPr>
+          <a:xfrm>
+            <a:off x="6400800" y="1975104"/>
+            <a:ext cx="4876495" cy="310896"/>
+          </a:xfrm>
+          <a:prstGeom prst="roundRect">
+            <a:avLst>
+              <a:gd name="adj" fmla="val 35000"/>
+            </a:avLst>
+          </a:prstGeom>
+          <a:solidFill>
+            <a:srgbClr val="162D52"/>
+          </a:solidFill>
+          <a:ln w="12700">
+            <a:solidFill>
+              <a:srgbClr val="10B981"/>
+            </a:solidFill>
+          </a:ln>
+        </p:spPr>
+        <p:style>
+          <a:lnRef idx="1">
+            <a:schemeClr val="accent1"/>
+          </a:lnRef>
+          <a:fillRef idx="3">
+            <a:schemeClr val="accent1"/>
+          </a:fillRef>
+          <a:effectRef idx="2">
+            <a:schemeClr val="accent1"/>
+          </a:effectRef>
+          <a:fontRef idx="minor">
+            <a:schemeClr val="lt1"/>
+          </a:fontRef>
+        </p:style>
+        <p:txBody>
+          <a:bodyPr rtlCol="0" anchor="ctr" wrap="square" tIns="0" bIns="0" lIns="0" rIns="0"/>
+          <a:lstStyle/>
+          <a:p>
+            <a:pPr algn="l">
+              <a:defRPr sz="1150" b="1">
+                <a:solidFill>
+                  <a:srgbClr val="F0C860"/>
+                </a:solidFill>
+                <a:latin typeface="Segoe UI"/>
+              </a:defRPr>
+            </a:pPr>
+            <a:r>
+              <a:t> 50-Yr Proven Track Record | 10-Feddan Unit Shovel-Ready </a:t>
+            </a:r>
+          </a:p>
+        </p:txBody>
+      </p:sp>
+      <p:sp>
+        <p:nvSpPr>
+          <p:cNvPr id="13" name="TextBox 12"/>
+          <p:cNvSpPr txBox="1"/>
+          <p:nvPr/>
+        </p:nvSpPr>
+        <p:spPr>
+          <a:xfrm>
+            <a:off x="6419088" y="2340864"/>
+            <a:ext cx="4839919" cy="1527048"/>
+          </a:xfrm>
+          <a:prstGeom prst="rect">
+            <a:avLst/>
+          </a:prstGeom>
+          <a:noFill/>
+        </p:spPr>
+        <p:txBody>
+          <a:bodyPr wrap="square" tIns="0" bIns="0" lIns="0" rIns="0">
+            <a:spAutoFit/>
+          </a:bodyPr>
+          <a:lstStyle/>
+          <a:p>
+            <a:pPr algn="l">
+              <a:lnSpc>
+                <a:spcPct val="125000"/>
+              </a:lnSpc>
+              <a:spcAft>
+                <a:spcPts val="500"/>
+              </a:spcAft>
+            </a:pPr>
+            <a:r>
+              <a:rPr sz="1150" b="1">
+                <a:solidFill>
+                  <a:srgbClr val="F0C860"/>
+                </a:solidFill>
+                <a:latin typeface="Segoe UI"/>
+              </a:rPr>
+              <a:t>• Institutional Delivery Track Record: </a:t>
+            </a:r>
+            <a:r>
+              <a:rPr sz="1150">
+                <a:solidFill>
+                  <a:srgbClr val="F8FAFC"/>
+                </a:solidFill>
+                <a:latin typeface="Segoe UI"/>
+              </a:rPr>
+              <a:t>EPADP's 50-year proven experience across 6M feddans eliminates construction risk.</a:t>
+            </a:r>
+          </a:p>
+          <a:p>
+            <a:pPr algn="l">
+              <a:lnSpc>
+                <a:spcPct val="125000"/>
+              </a:lnSpc>
+              <a:spcAft>
+                <a:spcPts val="500"/>
+              </a:spcAft>
+            </a:pPr>
+            <a:r>
+              <a:rPr sz="1150" b="1">
+                <a:solidFill>
+                  <a:srgbClr val="10B981"/>
+                </a:solidFill>
+                <a:latin typeface="Segoe UI"/>
+              </a:rPr>
+              <a:t>• 10-Feddan Pilot Unit Ready: </a:t>
+            </a:r>
+            <a:r>
+              <a:rPr sz="1150">
+                <a:solidFill>
+                  <a:srgbClr val="F8FAFC"/>
+                </a:solidFill>
+                <a:latin typeface="Segoe UI"/>
+              </a:rPr>
+              <a:t>Detailed engineering ready for immediate deployment on an isolated collector line.</a:t>
+            </a:r>
+          </a:p>
+          <a:p>
+            <a:pPr algn="l">
+              <a:lnSpc>
+                <a:spcPct val="125000"/>
+              </a:lnSpc>
+              <a:spcAft>
+                <a:spcPts val="500"/>
+              </a:spcAft>
+            </a:pPr>
+            <a:r>
+              <a:rPr sz="1150" b="1">
+                <a:solidFill>
+                  <a:srgbClr val="10B981"/>
+                </a:solidFill>
+                <a:latin typeface="Segoe UI"/>
+              </a:rPr>
+              <a:t>• Technology Maturity (TRL 8-9): </a:t>
+            </a:r>
+            <a:r>
+              <a:rPr sz="1150">
+                <a:solidFill>
+                  <a:srgbClr val="F8FAFC"/>
+                </a:solidFill>
+                <a:latin typeface="Segoe UI"/>
+              </a:rPr>
+              <a:t>High commercial maturity for HDPE pipes, solar systems, and NB-IoT telemetry.</a:t>
+            </a:r>
+          </a:p>
+          <a:p>
+            <a:pPr algn="l">
+              <a:lnSpc>
+                <a:spcPct val="125000"/>
+              </a:lnSpc>
+              <a:spcAft>
+                <a:spcPts val="0"/>
+              </a:spcAft>
+            </a:pPr>
+            <a:r>
+              <a:rPr sz="1150" b="1">
+                <a:solidFill>
+                  <a:srgbClr val="F0C860"/>
+                </a:solidFill>
+                <a:latin typeface="Segoe UI"/>
+              </a:rPr>
+              <a:t>• Immediate Action Step: </a:t>
+            </a:r>
+            <a:r>
+              <a:rPr sz="1150">
+                <a:solidFill>
+                  <a:srgbClr val="F8FAFC"/>
+                </a:solidFill>
+                <a:latin typeface="Segoe UI"/>
+              </a:rPr>
+              <a:t>Request Project Preparation Facility (PPF $1.5M) from GCF/AfDB for Kafr El-Sheikh.</a:t>
+            </a:r>
+          </a:p>
+        </p:txBody>
+      </p:sp>
+      <p:sp>
+        <p:nvSpPr>
+          <p:cNvPr id="14" name="Rounded Rectangle 13"/>
+          <p:cNvSpPr/>
+          <p:nvPr/>
+        </p:nvSpPr>
+        <p:spPr>
+          <a:xfrm>
+            <a:off x="731520" y="4069080"/>
+            <a:ext cx="5212080" cy="2423160"/>
+          </a:xfrm>
+          <a:prstGeom prst="roundRect">
+            <a:avLst>
+              <a:gd name="adj" fmla="val 8000"/>
+            </a:avLst>
+          </a:prstGeom>
+          <a:solidFill>
+            <a:srgbClr val="0F2240"/>
+          </a:solidFill>
+          <a:ln w="16510">
+            <a:solidFill>
+              <a:srgbClr val="15B5A4"/>
+            </a:solidFill>
+          </a:ln>
+        </p:spPr>
+        <p:style>
+          <a:lnRef idx="1">
+            <a:schemeClr val="accent1"/>
+          </a:lnRef>
+          <a:fillRef idx="3">
+            <a:schemeClr val="accent1"/>
+          </a:fillRef>
+          <a:effectRef idx="2">
+            <a:schemeClr val="accent1"/>
+          </a:effectRef>
+          <a:fontRef idx="minor">
+            <a:schemeClr val="lt1"/>
+          </a:fontRef>
+        </p:style>
+        <p:txBody>
+          <a:bodyPr rtlCol="0" anchor="ctr"/>
+          <a:lstStyle/>
+          <a:p>
+            <a:pPr algn="ctr"/>
+          </a:p>
+        </p:txBody>
+      </p:sp>
+      <p:sp>
+        <p:nvSpPr>
+          <p:cNvPr id="15" name="TextBox 14"/>
+          <p:cNvSpPr txBox="1"/>
+          <p:nvPr/>
+        </p:nvSpPr>
+        <p:spPr>
+          <a:xfrm>
+            <a:off x="932688" y="4178808"/>
+            <a:ext cx="4809744" cy="347472"/>
+          </a:xfrm>
+          <a:prstGeom prst="rect">
+            <a:avLst/>
+          </a:prstGeom>
+          <a:noFill/>
+        </p:spPr>
+        <p:txBody>
+          <a:bodyPr wrap="square" tIns="0" bIns="0" lIns="0" rIns="0">
+            <a:spAutoFit/>
+          </a:bodyPr>
+          <a:lstStyle/>
+          <a:p>
+            <a:pPr algn="l">
+              <a:defRPr sz="1450" b="1">
+                <a:solidFill>
+                  <a:srgbClr val="15B5A4"/>
+                </a:solidFill>
+                <a:latin typeface="Segoe UI"/>
+              </a:defRPr>
+            </a:pPr>
+            <a:r>
+              <a:t>🎯 3. Funding Call Fit Score Assessment</a:t>
+            </a:r>
+          </a:p>
+        </p:txBody>
+      </p:sp>
+      <p:sp>
+        <p:nvSpPr>
+          <p:cNvPr id="16" name="Rounded Rectangle 15"/>
+          <p:cNvSpPr/>
+          <p:nvPr/>
+        </p:nvSpPr>
+        <p:spPr>
+          <a:xfrm>
+            <a:off x="914400" y="4507992"/>
+            <a:ext cx="4846320" cy="310896"/>
+          </a:xfrm>
+          <a:prstGeom prst="roundRect">
+            <a:avLst>
+              <a:gd name="adj" fmla="val 35000"/>
+            </a:avLst>
+          </a:prstGeom>
+          <a:solidFill>
+            <a:srgbClr val="162D52"/>
           </a:solidFill>
           <a:ln w="12700">
             <a:solidFill>
@@ -4420,23 +6622,33 @@
           </a:fontRef>
         </p:style>
         <p:txBody>
-          <a:bodyPr rtlCol="0" anchor="ctr"/>
-          <a:lstStyle/>
-          <a:p>
-            <a:pPr algn="ctr"/>
-          </a:p>
-        </p:txBody>
-      </p:sp>
-      <p:sp>
-        <p:nvSpPr>
-          <p:cNvPr id="5" name="TextBox 4"/>
+          <a:bodyPr rtlCol="0" anchor="ctr" wrap="square" tIns="0" bIns="0" lIns="0" rIns="0"/>
+          <a:lstStyle/>
+          <a:p>
+            <a:pPr algn="l">
+              <a:defRPr sz="1150" b="1">
+                <a:solidFill>
+                  <a:srgbClr val="F0C860"/>
+                </a:solidFill>
+                <a:latin typeface="Segoe UI"/>
+              </a:defRPr>
+            </a:pPr>
+            <a:r>
+              <a:t> GCF Adaptation: 14/14 (GO) | Adaptation Fund: 13/14 </a:t>
+            </a:r>
+          </a:p>
+        </p:txBody>
+      </p:sp>
+      <p:sp>
+        <p:nvSpPr>
+          <p:cNvPr id="17" name="TextBox 16"/>
           <p:cNvSpPr txBox="1"/>
           <p:nvPr/>
         </p:nvSpPr>
         <p:spPr>
           <a:xfrm>
-            <a:off x="914400" y="1600200"/>
-            <a:ext cx="4846320" cy="365760"/>
+            <a:off x="932688" y="4873752"/>
+            <a:ext cx="4809744" cy="1527048"/>
           </a:xfrm>
           <a:prstGeom prst="rect">
             <a:avLst/>
@@ -4450,133 +6662,112 @@
           <a:lstStyle/>
           <a:p>
             <a:pPr algn="l">
-              <a:defRPr sz="1200" b="1">
+              <a:lnSpc>
+                <a:spcPct val="125000"/>
+              </a:lnSpc>
+              <a:spcAft>
+                <a:spcPts val="600"/>
+              </a:spcAft>
+            </a:pPr>
+            <a:r>
+              <a:rPr sz="1150" b="1">
                 <a:solidFill>
                   <a:srgbClr val="F0C860"/>
                 </a:solidFill>
-              </a:defRPr>
-            </a:pPr>
-            <a:r>
-              <a:t>💰 1. Total Investment ($420M) &amp; Blended Capital Stack</a:t>
-            </a:r>
-          </a:p>
-        </p:txBody>
-      </p:sp>
-      <p:sp>
-        <p:nvSpPr>
-          <p:cNvPr id="6" name="TextBox 5"/>
-          <p:cNvSpPr txBox="1"/>
-          <p:nvPr/>
-        </p:nvSpPr>
-        <p:spPr>
-          <a:xfrm>
-            <a:off x="914400" y="1965960"/>
-            <a:ext cx="4846320" cy="1965960"/>
-          </a:xfrm>
-          <a:prstGeom prst="rect">
-            <a:avLst/>
-          </a:prstGeom>
-          <a:noFill/>
-        </p:spPr>
-        <p:txBody>
-          <a:bodyPr wrap="square" tIns="0" bIns="0" lIns="0" rIns="0">
-            <a:spAutoFit/>
-          </a:bodyPr>
-          <a:lstStyle/>
+                <a:latin typeface="Segoe UI"/>
+              </a:rPr>
+              <a:t>• Green Climate Fund (GCF Adaptation): </a:t>
+            </a:r>
+            <a:r>
+              <a:rPr sz="1150">
+                <a:solidFill>
+                  <a:srgbClr val="F8FAFC"/>
+                </a:solidFill>
+                <a:latin typeface="Segoe UI"/>
+              </a:rPr>
+              <a:t>Score: 14/14 (Decision: GO) — Perfect match for transformational adaptation &amp; digital MRV.</a:t>
+            </a:r>
+          </a:p>
           <a:p>
             <a:pPr algn="l">
-              <a:defRPr sz="880">
+              <a:lnSpc>
+                <a:spcPct val="125000"/>
+              </a:lnSpc>
+              <a:spcAft>
+                <a:spcPts val="600"/>
+              </a:spcAft>
+            </a:pPr>
+            <a:r>
+              <a:rPr sz="1150" b="1">
+                <a:solidFill>
+                  <a:srgbClr val="15B5A4"/>
+                </a:solidFill>
+                <a:latin typeface="Segoe UI"/>
+              </a:rPr>
+              <a:t>• Adaptation Fund: </a:t>
+            </a:r>
+            <a:r>
+              <a:rPr sz="1150">
                 <a:solidFill>
                   <a:srgbClr val="F8FAFC"/>
                 </a:solidFill>
-              </a:defRPr>
-            </a:pPr>
-            <a:r>
-              <a:t>• Total CAPEX: USD 420 Million ($4,200/feddan all-inclusive vs. $1,800/feddan baseline drainage).</a:t>
+                <a:latin typeface="Segoe UI"/>
+              </a:rPr>
+              <a:t>Score: 13/14 (Decision: GO) — Ideal for financing the 10-feddan pilot component.</a:t>
             </a:r>
           </a:p>
           <a:p>
             <a:pPr algn="l">
-              <a:defRPr sz="880">
+              <a:lnSpc>
+                <a:spcPct val="125000"/>
+              </a:lnSpc>
+              <a:spcAft>
+                <a:spcPts val="0"/>
+              </a:spcAft>
+            </a:pPr>
+            <a:r>
+              <a:rPr sz="1150" b="1">
+                <a:solidFill>
+                  <a:srgbClr val="15B5A4"/>
+                </a:solidFill>
+                <a:latin typeface="Segoe UI"/>
+              </a:rPr>
+              <a:t>• PRIMA &amp; EU Global Gateway: </a:t>
+            </a:r>
+            <a:r>
+              <a:rPr sz="1150">
                 <a:solidFill>
                   <a:srgbClr val="F8FAFC"/>
                 </a:solidFill>
-              </a:defRPr>
-            </a:pPr>
-            <a:r>
-              <a:t>• 15% Grants / TA ($63M): GCF Readiness, AfDB, GEF for Feasibility, 10-feddan pilot, Digital Twin.</a:t>
-            </a:r>
-          </a:p>
-          <a:p>
-            <a:pPr algn="l">
-              <a:defRPr sz="880">
-                <a:solidFill>
-                  <a:srgbClr val="F8FAFC"/>
-                </a:solidFill>
-              </a:defRPr>
-            </a:pPr>
-            <a:r>
-              <a:t>• 20% Government Equity ($84M): In-kind land for wetlands, existing pump stations, EPADP engineering staff.</a:t>
-            </a:r>
-          </a:p>
-          <a:p>
-            <a:pPr algn="l">
-              <a:defRPr sz="880">
-                <a:solidFill>
-                  <a:srgbClr val="F8FAFC"/>
-                </a:solidFill>
-              </a:defRPr>
-            </a:pPr>
-            <a:r>
-              <a:t>• 40% Concessional Debt ($168M): World Bank (NDP V), AfDB, IsDB (20–25 yr tenor, long grace period).</a:t>
-            </a:r>
-          </a:p>
-          <a:p>
-            <a:pPr algn="l">
-              <a:defRPr sz="880">
-                <a:solidFill>
-                  <a:srgbClr val="F8FAFC"/>
-                </a:solidFill>
-              </a:defRPr>
-            </a:pPr>
-            <a:r>
-              <a:t>• 25% Commercial Debt / PPP ($105M): Private solar developers secured by solar PPA and energy savings.</a:t>
-            </a:r>
-          </a:p>
-          <a:p>
-            <a:pPr algn="l">
-              <a:defRPr sz="880">
-                <a:solidFill>
-                  <a:srgbClr val="F8FAFC"/>
-                </a:solidFill>
-              </a:defRPr>
-            </a:pPr>
-            <a:r>
-              <a:t>• Financial Returns: Project EIRR: 21.4% | DSCR: 1.35x (stress tested) | Payback: 8 years.</a:t>
-            </a:r>
-          </a:p>
-        </p:txBody>
-      </p:sp>
-      <p:sp>
-        <p:nvSpPr>
-          <p:cNvPr id="7" name="Rounded Rectangle 6"/>
+                <a:latin typeface="Segoe UI"/>
+              </a:rPr>
+              <a:t>High fit for Euro-Mediterranean water innovation and circular climate agriculture.</a:t>
+            </a:r>
+          </a:p>
+        </p:txBody>
+      </p:sp>
+      <p:sp>
+        <p:nvSpPr>
+          <p:cNvPr id="18" name="Rounded Rectangle 17"/>
           <p:cNvSpPr/>
           <p:nvPr/>
         </p:nvSpPr>
         <p:spPr>
           <a:xfrm>
-            <a:off x="731520" y="4160520"/>
-            <a:ext cx="5212080" cy="2240280"/>
+            <a:off x="6217920" y="4069080"/>
+            <a:ext cx="5242255" cy="2423160"/>
           </a:xfrm>
           <a:prstGeom prst="roundRect">
-            <a:avLst/>
+            <a:avLst>
+              <a:gd name="adj" fmla="val 8000"/>
+            </a:avLst>
           </a:prstGeom>
           <a:solidFill>
             <a:srgbClr val="0F2240"/>
           </a:solidFill>
-          <a:ln w="12700">
+          <a:ln w="16510">
             <a:solidFill>
-              <a:srgbClr val="15B5A4"/>
+              <a:srgbClr val="F8FAFC"/>
             </a:solidFill>
           </a:ln>
         </p:spPr>
@@ -4604,14 +6795,14 @@
       </p:sp>
       <p:sp>
         <p:nvSpPr>
-          <p:cNvPr id="8" name="TextBox 7"/>
+          <p:cNvPr id="19" name="TextBox 18"/>
           <p:cNvSpPr txBox="1"/>
           <p:nvPr/>
         </p:nvSpPr>
         <p:spPr>
           <a:xfrm>
-            <a:off x="914400" y="4297680"/>
-            <a:ext cx="4846320" cy="365760"/>
+            <a:off x="6419088" y="4178808"/>
+            <a:ext cx="4839919" cy="347472"/>
           </a:xfrm>
           <a:prstGeom prst="rect">
             <a:avLst/>
@@ -4625,97 +6816,41 @@
           <a:lstStyle/>
           <a:p>
             <a:pPr algn="l">
-              <a:defRPr sz="1200" b="1">
-                <a:solidFill>
-                  <a:srgbClr val="15B5A4"/>
-                </a:solidFill>
+              <a:defRPr sz="1450" b="1">
+                <a:solidFill>
+                  <a:srgbClr val="F8FAFC"/>
+                </a:solidFill>
+                <a:latin typeface="Segoe UI"/>
               </a:defRPr>
             </a:pPr>
             <a:r>
-              <a:t>🎯 2. Funding Call Fit Score Assessment</a:t>
-            </a:r>
-          </a:p>
-        </p:txBody>
-      </p:sp>
-      <p:sp>
-        <p:nvSpPr>
-          <p:cNvPr id="9" name="TextBox 8"/>
-          <p:cNvSpPr txBox="1"/>
-          <p:nvPr/>
-        </p:nvSpPr>
-        <p:spPr>
-          <a:xfrm>
-            <a:off x="914400" y="4663440"/>
-            <a:ext cx="4846320" cy="1645920"/>
-          </a:xfrm>
-          <a:prstGeom prst="rect">
-            <a:avLst/>
-          </a:prstGeom>
-          <a:noFill/>
-        </p:spPr>
-        <p:txBody>
-          <a:bodyPr wrap="square" tIns="0" bIns="0" lIns="0" rIns="0">
-            <a:spAutoFit/>
-          </a:bodyPr>
-          <a:lstStyle/>
-          <a:p>
-            <a:pPr algn="l">
-              <a:defRPr sz="880">
-                <a:solidFill>
-                  <a:srgbClr val="F8FAFC"/>
-                </a:solidFill>
-              </a:defRPr>
-            </a:pPr>
-            <a:r>
-              <a:t>• Green Climate Fund (GCF) Adaptation Window: 14/14 Score (Decision: GO) — Perfect match for transformational adaptation, mitigation co-benefits, and MRV automation.</a:t>
-            </a:r>
-          </a:p>
-          <a:p>
-            <a:pPr algn="l">
-              <a:defRPr sz="880">
-                <a:solidFill>
-                  <a:srgbClr val="F8FAFC"/>
-                </a:solidFill>
-              </a:defRPr>
-            </a:pPr>
-            <a:r>
-              <a:t>• Adaptation Fund: 13/14 Score (Decision: GO for Component / 10-feddan Pilot Submission).</a:t>
-            </a:r>
-          </a:p>
-          <a:p>
-            <a:pPr algn="l">
-              <a:defRPr sz="880">
-                <a:solidFill>
-                  <a:srgbClr val="F8FAFC"/>
-                </a:solidFill>
-              </a:defRPr>
-            </a:pPr>
-            <a:r>
-              <a:t>• PRIMA &amp; EU Global Gateway: High Fit for Euro-Mediterranean digital water management, circular agriculture, and climate resilience.</a:t>
-            </a:r>
-          </a:p>
-        </p:txBody>
-      </p:sp>
-      <p:sp>
-        <p:nvSpPr>
-          <p:cNvPr id="10" name="Rounded Rectangle 9"/>
+              <a:t>📈 4. Main Expected Results &amp; Regional Scaling Pathway</a:t>
+            </a:r>
+          </a:p>
+        </p:txBody>
+      </p:sp>
+      <p:sp>
+        <p:nvSpPr>
+          <p:cNvPr id="20" name="Rounded Rectangle 19"/>
           <p:cNvSpPr/>
           <p:nvPr/>
         </p:nvSpPr>
         <p:spPr>
           <a:xfrm>
-            <a:off x="6217920" y="1463040"/>
-            <a:ext cx="5242255" cy="2240280"/>
+            <a:off x="6400800" y="4507992"/>
+            <a:ext cx="4876495" cy="310896"/>
           </a:xfrm>
           <a:prstGeom prst="roundRect">
-            <a:avLst/>
+            <a:avLst>
+              <a:gd name="adj" fmla="val 35000"/>
+            </a:avLst>
           </a:prstGeom>
           <a:solidFill>
-            <a:srgbClr val="0F2240"/>
+            <a:srgbClr val="162D52"/>
           </a:solidFill>
           <a:ln w="12700">
             <a:solidFill>
-              <a:srgbClr val="15B5A4"/>
+              <a:srgbClr val="F8FAFC"/>
             </a:solidFill>
           </a:ln>
         </p:spPr>
@@ -4734,23 +6869,33 @@
           </a:fontRef>
         </p:style>
         <p:txBody>
-          <a:bodyPr rtlCol="0" anchor="ctr"/>
-          <a:lstStyle/>
-          <a:p>
-            <a:pPr algn="ctr"/>
-          </a:p>
-        </p:txBody>
-      </p:sp>
-      <p:sp>
-        <p:nvSpPr>
-          <p:cNvPr id="11" name="TextBox 10"/>
+          <a:bodyPr rtlCol="0" anchor="ctr" wrap="square" tIns="0" bIns="0" lIns="0" rIns="0"/>
+          <a:lstStyle/>
+          <a:p>
+            <a:pPr algn="l">
+              <a:defRPr sz="1150" b="1">
+                <a:solidFill>
+                  <a:srgbClr val="F0C860"/>
+                </a:solidFill>
+                <a:latin typeface="Segoe UI"/>
+              </a:defRPr>
+            </a:pPr>
+            <a:r>
+              <a:t> 150M m³ Water Saved | +25% Yield | 50 MW Solar | 100k tCO₂ </a:t>
+            </a:r>
+          </a:p>
+        </p:txBody>
+      </p:sp>
+      <p:sp>
+        <p:nvSpPr>
+          <p:cNvPr id="21" name="TextBox 20"/>
           <p:cNvSpPr txBox="1"/>
           <p:nvPr/>
         </p:nvSpPr>
         <p:spPr>
           <a:xfrm>
-            <a:off x="6400800" y="1600200"/>
-            <a:ext cx="4876495" cy="365760"/>
+            <a:off x="6419088" y="4873752"/>
+            <a:ext cx="4839919" cy="1527048"/>
           </a:xfrm>
           <a:prstGeom prst="rect">
             <a:avLst/>
@@ -4764,272 +6909,86 @@
           <a:lstStyle/>
           <a:p>
             <a:pPr algn="l">
-              <a:defRPr sz="1200" b="1">
-                <a:solidFill>
-                  <a:srgbClr val="10B981"/>
-                </a:solidFill>
-              </a:defRPr>
-            </a:pPr>
-            <a:r>
-              <a:t>🚀 3. Implementation Readiness &amp; 10-Feddan Pilot Unit</a:t>
-            </a:r>
-          </a:p>
-        </p:txBody>
-      </p:sp>
-      <p:sp>
-        <p:nvSpPr>
-          <p:cNvPr id="12" name="TextBox 11"/>
-          <p:cNvSpPr txBox="1"/>
-          <p:nvPr/>
-        </p:nvSpPr>
-        <p:spPr>
-          <a:xfrm>
-            <a:off x="6400800" y="1965960"/>
-            <a:ext cx="4876495" cy="1645920"/>
-          </a:xfrm>
-          <a:prstGeom prst="rect">
-            <a:avLst/>
-          </a:prstGeom>
-          <a:noFill/>
-        </p:spPr>
-        <p:txBody>
-          <a:bodyPr wrap="square" tIns="0" bIns="0" lIns="0" rIns="0">
-            <a:spAutoFit/>
-          </a:bodyPr>
-          <a:lstStyle/>
+              <a:lnSpc>
+                <a:spcPct val="125000"/>
+              </a:lnSpc>
+              <a:spcAft>
+                <a:spcPts val="600"/>
+              </a:spcAft>
+            </a:pPr>
+            <a:r>
+              <a:rPr sz="1150" b="1">
+                <a:solidFill>
+                  <a:srgbClr val="F0C860"/>
+                </a:solidFill>
+                <a:latin typeface="Segoe UI"/>
+              </a:rPr>
+              <a:t>• Core Target KPIs (100,000 Feddans): </a:t>
+            </a:r>
+            <a:r>
+              <a:rPr sz="1150">
+                <a:solidFill>
+                  <a:srgbClr val="F8FAFC"/>
+                </a:solidFill>
+                <a:latin typeface="Segoe UI"/>
+              </a:rPr>
+              <a:t>150M m³/yr water saved • 15-25% crop yield increase • 50 MW clean power.</a:t>
+            </a:r>
+          </a:p>
           <a:p>
             <a:pPr algn="l">
-              <a:defRPr sz="880">
+              <a:lnSpc>
+                <a:spcPct val="125000"/>
+              </a:lnSpc>
+              <a:spcAft>
+                <a:spcPts val="600"/>
+              </a:spcAft>
+            </a:pPr>
+            <a:r>
+              <a:rPr sz="1150" b="1">
                 <a:solidFill>
                   <a:srgbClr val="F8FAFC"/>
                 </a:solidFill>
-              </a:defRPr>
-            </a:pPr>
-            <a:r>
-              <a:t>• Institutional Maturity: Built on EPADP's 50-year delivery platform (6M feddans installed); eliminates construction and execution risks.</a:t>
+                <a:latin typeface="Segoe UI"/>
+              </a:rPr>
+              <a:t>• Active Security &amp; Carbon: </a:t>
+            </a:r>
+            <a:r>
+              <a:rPr sz="1150">
+                <a:solidFill>
+                  <a:srgbClr val="F8FAFC"/>
+                </a:solidFill>
+                <a:latin typeface="Segoe UI"/>
+              </a:rPr>
+              <a:t>80% tampering cut • incident response in 1 hour • 100,000 tCO₂e/yr emissions offset.</a:t>
             </a:r>
           </a:p>
           <a:p>
             <a:pPr algn="l">
-              <a:defRPr sz="880">
+              <a:lnSpc>
+                <a:spcPct val="125000"/>
+              </a:lnSpc>
+              <a:spcAft>
+                <a:spcPts val="0"/>
+              </a:spcAft>
+            </a:pPr>
+            <a:r>
+              <a:rPr sz="1100" b="1">
+                <a:solidFill>
+                  <a:srgbClr val="15B5A4"/>
+                </a:solidFill>
+                <a:latin typeface="Segoe UI"/>
+              </a:rPr>
+              <a:t>• 3-Stage Scaling Pathway: </a:t>
+            </a:r>
+            <a:r>
+              <a:rPr sz="1100">
                 <a:solidFill>
                   <a:srgbClr val="F8FAFC"/>
                 </a:solidFill>
-              </a:defRPr>
-            </a:pPr>
-            <a:r>
-              <a:t>• 10-Feddan Pilot Validation Unit: Engineered for immediate launch on a single isolated collector network to test dynamic capillary rise and IoT valve loops before scaling.</a:t>
-            </a:r>
-          </a:p>
-          <a:p>
-            <a:pPr algn="l">
-              <a:defRPr sz="880">
-                <a:solidFill>
-                  <a:srgbClr val="F8FAFC"/>
-                </a:solidFill>
-              </a:defRPr>
-            </a:pPr>
-            <a:r>
-              <a:t>• Technology Readiness Level: High TRL (TRL 8-9) for HDPE pipes, solar PV, and LoRaWAN/NB-IoT ESP32 hardware.</a:t>
-            </a:r>
-          </a:p>
-          <a:p>
-            <a:pPr algn="l">
-              <a:defRPr sz="880">
-                <a:solidFill>
-                  <a:srgbClr val="F8FAFC"/>
-                </a:solidFill>
-              </a:defRPr>
-            </a:pPr>
-            <a:r>
-              <a:t>• Immediate Next Step: Request Project Preparation Facility (PPF) Grant ($1.5M) from GCF/AfDB for site-specific feasibility in Kafr El-Sheikh.</a:t>
-            </a:r>
-          </a:p>
-        </p:txBody>
-      </p:sp>
-      <p:sp>
-        <p:nvSpPr>
-          <p:cNvPr id="13" name="Rounded Rectangle 12"/>
-          <p:cNvSpPr/>
-          <p:nvPr/>
-        </p:nvSpPr>
-        <p:spPr>
-          <a:xfrm>
-            <a:off x="6217920" y="3840480"/>
-            <a:ext cx="5242255" cy="2560320"/>
-          </a:xfrm>
-          <a:prstGeom prst="roundRect">
-            <a:avLst/>
-          </a:prstGeom>
-          <a:solidFill>
-            <a:srgbClr val="0F2240"/>
-          </a:solidFill>
-          <a:ln w="12700">
-            <a:solidFill>
-              <a:srgbClr val="15B5A4"/>
-            </a:solidFill>
-          </a:ln>
-        </p:spPr>
-        <p:style>
-          <a:lnRef idx="1">
-            <a:schemeClr val="accent1"/>
-          </a:lnRef>
-          <a:fillRef idx="3">
-            <a:schemeClr val="accent1"/>
-          </a:fillRef>
-          <a:effectRef idx="2">
-            <a:schemeClr val="accent1"/>
-          </a:effectRef>
-          <a:fontRef idx="minor">
-            <a:schemeClr val="lt1"/>
-          </a:fontRef>
-        </p:style>
-        <p:txBody>
-          <a:bodyPr rtlCol="0" anchor="ctr"/>
-          <a:lstStyle/>
-          <a:p>
-            <a:pPr algn="ctr"/>
-          </a:p>
-        </p:txBody>
-      </p:sp>
-      <p:sp>
-        <p:nvSpPr>
-          <p:cNvPr id="14" name="TextBox 13"/>
-          <p:cNvSpPr txBox="1"/>
-          <p:nvPr/>
-        </p:nvSpPr>
-        <p:spPr>
-          <a:xfrm>
-            <a:off x="6400800" y="3977640"/>
-            <a:ext cx="4876495" cy="365760"/>
-          </a:xfrm>
-          <a:prstGeom prst="rect">
-            <a:avLst/>
-          </a:prstGeom>
-          <a:noFill/>
-        </p:spPr>
-        <p:txBody>
-          <a:bodyPr wrap="square" tIns="0" bIns="0" lIns="0" rIns="0">
-            <a:spAutoFit/>
-          </a:bodyPr>
-          <a:lstStyle/>
-          <a:p>
-            <a:pPr algn="l">
-              <a:defRPr sz="1200" b="1">
-                <a:solidFill>
-                  <a:srgbClr val="F8FAFC"/>
-                </a:solidFill>
-              </a:defRPr>
-            </a:pPr>
-            <a:r>
-              <a:t>📈 4. Main Expected Results &amp; Regional Scaling Pathway</a:t>
-            </a:r>
-          </a:p>
-        </p:txBody>
-      </p:sp>
-      <p:sp>
-        <p:nvSpPr>
-          <p:cNvPr id="15" name="TextBox 14"/>
-          <p:cNvSpPr txBox="1"/>
-          <p:nvPr/>
-        </p:nvSpPr>
-        <p:spPr>
-          <a:xfrm>
-            <a:off x="6400800" y="4343400"/>
-            <a:ext cx="4876495" cy="1965960"/>
-          </a:xfrm>
-          <a:prstGeom prst="rect">
-            <a:avLst/>
-          </a:prstGeom>
-          <a:noFill/>
-        </p:spPr>
-        <p:txBody>
-          <a:bodyPr wrap="square" tIns="0" bIns="0" lIns="0" rIns="0">
-            <a:spAutoFit/>
-          </a:bodyPr>
-          <a:lstStyle/>
-          <a:p>
-            <a:pPr algn="l">
-              <a:defRPr sz="850">
-                <a:solidFill>
-                  <a:srgbClr val="F0C860"/>
-                </a:solidFill>
-              </a:defRPr>
-            </a:pPr>
-            <a:r>
-              <a:t>Core Quantified KPIs (Target: 100,000 Feddans): </a:t>
-            </a:r>
-          </a:p>
-          <a:p>
-            <a:pPr algn="l">
-              <a:defRPr sz="850">
-                <a:solidFill>
-                  <a:srgbClr val="F8FAFC"/>
-                </a:solidFill>
-              </a:defRPr>
-            </a:pPr>
-            <a:r>
-              <a:t>• 150 Million m³/yr water saved (smart controlled capillary drainage).</a:t>
-            </a:r>
-          </a:p>
-          <a:p>
-            <a:pPr algn="l">
-              <a:defRPr sz="850">
-                <a:solidFill>
-                  <a:srgbClr val="F8FAFC"/>
-                </a:solidFill>
-              </a:defRPr>
-            </a:pPr>
-            <a:r>
-              <a:t>• 15–25% crop yield boost across 200,000+ direct beneficiary farmers.</a:t>
-            </a:r>
-          </a:p>
-          <a:p>
-            <a:pPr algn="l">
-              <a:defRPr sz="850">
-                <a:solidFill>
-                  <a:srgbClr val="F8FAFC"/>
-                </a:solidFill>
-              </a:defRPr>
-            </a:pPr>
-            <a:r>
-              <a:t>• 50 MW solar installed &amp; 90 GWh/yr clean energy produced.</a:t>
-            </a:r>
-          </a:p>
-          <a:p>
-            <a:pPr algn="l">
-              <a:defRPr sz="850">
-                <a:solidFill>
-                  <a:srgbClr val="F8FAFC"/>
-                </a:solidFill>
-              </a:defRPr>
-            </a:pPr>
-            <a:r>
-              <a:t>• 80% reduction in tampering incidents + failure detection from weeks to 1 hour.</a:t>
-            </a:r>
-          </a:p>
-          <a:p>
-            <a:pPr algn="l">
-              <a:defRPr sz="850">
-                <a:solidFill>
-                  <a:srgbClr val="F8FAFC"/>
-                </a:solidFill>
-              </a:defRPr>
-            </a:pPr>
-            <a:r>
-              <a:t>• 100,000 tCO₂e/yr emissions reduced via solar energy and restored wetlands.</a:t>
-            </a:r>
-          </a:p>
-          <a:p>
-            <a:pPr algn="l">
-              <a:defRPr sz="850">
-                <a:solidFill>
-                  <a:srgbClr val="F0C860"/>
-                </a:solidFill>
-              </a:defRPr>
-            </a:pPr>
-            <a:r>
-              <a:t>Replication &amp; Scaling Strategy: Phase 1: 10-feddan pilot (Yr 1) -&gt; Phase 2: 100k feddans core pilot (Yrs 2-5) -&gt; Phase 3: Scaling across 4.3M feddans of Delta drainage and exporting model to Iraq, Jordan, and Pakistan.</a:t>
+                <a:latin typeface="Segoe UI"/>
+              </a:rPr>
+              <a:t>Phase 1: 10-feddan pilot (Yr 1) ➡️ Phase 2: 100k feddans (Yrs 2-5) ➡️ Phase 3: Scaling to 4.3M feddans in Nile Delta and exporting to Iraq, Jordan, and Pakistan.</a:t>
             </a:r>
           </a:p>
         </p:txBody>
